--- a/神哪我要讚美袮.pptx
+++ b/神哪我要讚美袮.pptx
@@ -5,9 +5,13 @@
     <p:sldMasterId id="2147483660" r:id="rId1"/>
   </p:sldMasterIdLst>
   <p:sldIdLst>
-    <p:sldId id="257" r:id="rId2"/>
-    <p:sldId id="258" r:id="rId3"/>
-    <p:sldId id="259" r:id="rId4"/>
+    <p:sldId id="391" r:id="rId2"/>
+    <p:sldId id="392" r:id="rId3"/>
+    <p:sldId id="672" r:id="rId4"/>
+    <p:sldId id="673" r:id="rId5"/>
+    <p:sldId id="674" r:id="rId6"/>
+    <p:sldId id="675" r:id="rId7"/>
+    <p:sldId id="676" r:id="rId8"/>
   </p:sldIdLst>
   <p:sldSz cx="12192000" cy="6858000"/>
   <p:notesSz cx="6858000" cy="9144000"/>
@@ -106,6 +110,11 @@
       </a:defRPr>
     </a:lvl9pPr>
   </p:defaultTextStyle>
+  <p:extLst>
+    <p:ext uri="{EFAFB233-063F-42B5-8137-9DF3F51BA10A}">
+      <p15:sldGuideLst xmlns:p15="http://schemas.microsoft.com/office/powerpoint/2012/main"/>
+    </p:ext>
+  </p:extLst>
 </p:presentation>
 </file>
 
@@ -147,7 +156,7 @@
           <a:lstStyle/>
           <a:p>
             <a:r>
-              <a:rPr lang="en-US" altLang="zh-TW" smtClean="0"/>
+              <a:rPr lang="en-US" altLang="zh-TW"/>
               <a:t>Click to edit Master title style</a:t>
             </a:r>
             <a:endParaRPr lang="zh-TW" altLang="en-US"/>
@@ -266,7 +275,7 @@
           </a:lstStyle>
           <a:p>
             <a:r>
-              <a:rPr lang="en-US" altLang="zh-TW" smtClean="0"/>
+              <a:rPr lang="en-US" altLang="zh-TW"/>
               <a:t>Click to edit Master subtitle style</a:t>
             </a:r>
             <a:endParaRPr lang="zh-TW" altLang="en-US"/>
@@ -290,7 +299,7 @@
           <a:p>
             <a:fld id="{80E57162-8466-4E04-98B9-5A5DF6984273}" type="datetimeFigureOut">
               <a:rPr lang="vi-VN" smtClean="0"/>
-              <a:t>18/07/2020</a:t>
+              <a:t>31/05/2025</a:t>
             </a:fld>
             <a:endParaRPr lang="vi-VN"/>
           </a:p>
@@ -384,7 +393,7 @@
           <a:lstStyle/>
           <a:p>
             <a:r>
-              <a:rPr lang="en-US" altLang="zh-TW" smtClean="0"/>
+              <a:rPr lang="en-US" altLang="zh-TW"/>
               <a:t>Click to edit Master title style</a:t>
             </a:r>
             <a:endParaRPr lang="zh-TW" altLang="en-US"/>
@@ -408,35 +417,35 @@
           <a:p>
             <a:pPr lvl="0"/>
             <a:r>
-              <a:rPr lang="en-US" altLang="zh-TW" smtClean="0"/>
+              <a:rPr lang="en-US" altLang="zh-TW"/>
               <a:t>Edit Master text styles</a:t>
             </a:r>
           </a:p>
           <a:p>
             <a:pPr lvl="1"/>
             <a:r>
-              <a:rPr lang="en-US" altLang="zh-TW" smtClean="0"/>
+              <a:rPr lang="en-US" altLang="zh-TW"/>
               <a:t>Second level</a:t>
             </a:r>
           </a:p>
           <a:p>
             <a:pPr lvl="2"/>
             <a:r>
-              <a:rPr lang="en-US" altLang="zh-TW" smtClean="0"/>
+              <a:rPr lang="en-US" altLang="zh-TW"/>
               <a:t>Third level</a:t>
             </a:r>
           </a:p>
           <a:p>
             <a:pPr lvl="3"/>
             <a:r>
-              <a:rPr lang="en-US" altLang="zh-TW" smtClean="0"/>
+              <a:rPr lang="en-US" altLang="zh-TW"/>
               <a:t>Fourth level</a:t>
             </a:r>
           </a:p>
           <a:p>
             <a:pPr lvl="4"/>
             <a:r>
-              <a:rPr lang="en-US" altLang="zh-TW" smtClean="0"/>
+              <a:rPr lang="en-US" altLang="zh-TW"/>
               <a:t>Fifth level</a:t>
             </a:r>
             <a:endParaRPr lang="zh-TW" altLang="en-US"/>
@@ -460,7 +469,7 @@
           <a:p>
             <a:fld id="{80E57162-8466-4E04-98B9-5A5DF6984273}" type="datetimeFigureOut">
               <a:rPr lang="vi-VN" smtClean="0"/>
-              <a:t>18/07/2020</a:t>
+              <a:t>31/05/2025</a:t>
             </a:fld>
             <a:endParaRPr lang="vi-VN"/>
           </a:p>
@@ -559,7 +568,7 @@
           <a:lstStyle/>
           <a:p>
             <a:r>
-              <a:rPr lang="en-US" altLang="zh-TW" smtClean="0"/>
+              <a:rPr lang="en-US" altLang="zh-TW"/>
               <a:t>Click to edit Master title style</a:t>
             </a:r>
             <a:endParaRPr lang="zh-TW" altLang="en-US"/>
@@ -588,35 +597,35 @@
           <a:p>
             <a:pPr lvl="0"/>
             <a:r>
-              <a:rPr lang="en-US" altLang="zh-TW" smtClean="0"/>
+              <a:rPr lang="en-US" altLang="zh-TW"/>
               <a:t>Edit Master text styles</a:t>
             </a:r>
           </a:p>
           <a:p>
             <a:pPr lvl="1"/>
             <a:r>
-              <a:rPr lang="en-US" altLang="zh-TW" smtClean="0"/>
+              <a:rPr lang="en-US" altLang="zh-TW"/>
               <a:t>Second level</a:t>
             </a:r>
           </a:p>
           <a:p>
             <a:pPr lvl="2"/>
             <a:r>
-              <a:rPr lang="en-US" altLang="zh-TW" smtClean="0"/>
+              <a:rPr lang="en-US" altLang="zh-TW"/>
               <a:t>Third level</a:t>
             </a:r>
           </a:p>
           <a:p>
             <a:pPr lvl="3"/>
             <a:r>
-              <a:rPr lang="en-US" altLang="zh-TW" smtClean="0"/>
+              <a:rPr lang="en-US" altLang="zh-TW"/>
               <a:t>Fourth level</a:t>
             </a:r>
           </a:p>
           <a:p>
             <a:pPr lvl="4"/>
             <a:r>
-              <a:rPr lang="en-US" altLang="zh-TW" smtClean="0"/>
+              <a:rPr lang="en-US" altLang="zh-TW"/>
               <a:t>Fifth level</a:t>
             </a:r>
             <a:endParaRPr lang="zh-TW" altLang="en-US"/>
@@ -640,7 +649,7 @@
           <a:p>
             <a:fld id="{80E57162-8466-4E04-98B9-5A5DF6984273}" type="datetimeFigureOut">
               <a:rPr lang="vi-VN" smtClean="0"/>
-              <a:t>18/07/2020</a:t>
+              <a:t>31/05/2025</a:t>
             </a:fld>
             <a:endParaRPr lang="vi-VN"/>
           </a:p>
@@ -734,7 +743,7 @@
           <a:lstStyle/>
           <a:p>
             <a:r>
-              <a:rPr lang="en-US" altLang="zh-TW" smtClean="0"/>
+              <a:rPr lang="en-US" altLang="zh-TW"/>
               <a:t>Click to edit Master title style</a:t>
             </a:r>
             <a:endParaRPr lang="zh-TW" altLang="en-US"/>
@@ -758,35 +767,35 @@
           <a:p>
             <a:pPr lvl="0"/>
             <a:r>
-              <a:rPr lang="en-US" altLang="zh-TW" smtClean="0"/>
+              <a:rPr lang="en-US" altLang="zh-TW"/>
               <a:t>Edit Master text styles</a:t>
             </a:r>
           </a:p>
           <a:p>
             <a:pPr lvl="1"/>
             <a:r>
-              <a:rPr lang="en-US" altLang="zh-TW" smtClean="0"/>
+              <a:rPr lang="en-US" altLang="zh-TW"/>
               <a:t>Second level</a:t>
             </a:r>
           </a:p>
           <a:p>
             <a:pPr lvl="2"/>
             <a:r>
-              <a:rPr lang="en-US" altLang="zh-TW" smtClean="0"/>
+              <a:rPr lang="en-US" altLang="zh-TW"/>
               <a:t>Third level</a:t>
             </a:r>
           </a:p>
           <a:p>
             <a:pPr lvl="3"/>
             <a:r>
-              <a:rPr lang="en-US" altLang="zh-TW" smtClean="0"/>
+              <a:rPr lang="en-US" altLang="zh-TW"/>
               <a:t>Fourth level</a:t>
             </a:r>
           </a:p>
           <a:p>
             <a:pPr lvl="4"/>
             <a:r>
-              <a:rPr lang="en-US" altLang="zh-TW" smtClean="0"/>
+              <a:rPr lang="en-US" altLang="zh-TW"/>
               <a:t>Fifth level</a:t>
             </a:r>
             <a:endParaRPr lang="zh-TW" altLang="en-US"/>
@@ -810,7 +819,7 @@
           <a:p>
             <a:fld id="{80E57162-8466-4E04-98B9-5A5DF6984273}" type="datetimeFigureOut">
               <a:rPr lang="vi-VN" smtClean="0"/>
-              <a:t>18/07/2020</a:t>
+              <a:t>31/05/2025</a:t>
             </a:fld>
             <a:endParaRPr lang="vi-VN"/>
           </a:p>
@@ -913,7 +922,7 @@
           </a:lstStyle>
           <a:p>
             <a:r>
-              <a:rPr lang="en-US" altLang="zh-TW" smtClean="0"/>
+              <a:rPr lang="en-US" altLang="zh-TW"/>
               <a:t>Click to edit Master title style</a:t>
             </a:r>
             <a:endParaRPr lang="zh-TW" altLang="en-US"/>
@@ -1033,7 +1042,7 @@
           <a:p>
             <a:pPr lvl="0"/>
             <a:r>
-              <a:rPr lang="en-US" altLang="zh-TW" smtClean="0"/>
+              <a:rPr lang="en-US" altLang="zh-TW"/>
               <a:t>Edit Master text styles</a:t>
             </a:r>
           </a:p>
@@ -1056,7 +1065,7 @@
           <a:p>
             <a:fld id="{80E57162-8466-4E04-98B9-5A5DF6984273}" type="datetimeFigureOut">
               <a:rPr lang="vi-VN" smtClean="0"/>
-              <a:t>18/07/2020</a:t>
+              <a:t>31/05/2025</a:t>
             </a:fld>
             <a:endParaRPr lang="vi-VN"/>
           </a:p>
@@ -1150,7 +1159,7 @@
           <a:lstStyle/>
           <a:p>
             <a:r>
-              <a:rPr lang="en-US" altLang="zh-TW" smtClean="0"/>
+              <a:rPr lang="en-US" altLang="zh-TW"/>
               <a:t>Click to edit Master title style</a:t>
             </a:r>
             <a:endParaRPr lang="zh-TW" altLang="en-US"/>
@@ -1207,35 +1216,35 @@
           <a:p>
             <a:pPr lvl="0"/>
             <a:r>
-              <a:rPr lang="en-US" altLang="zh-TW" smtClean="0"/>
+              <a:rPr lang="en-US" altLang="zh-TW"/>
               <a:t>Edit Master text styles</a:t>
             </a:r>
           </a:p>
           <a:p>
             <a:pPr lvl="1"/>
             <a:r>
-              <a:rPr lang="en-US" altLang="zh-TW" smtClean="0"/>
+              <a:rPr lang="en-US" altLang="zh-TW"/>
               <a:t>Second level</a:t>
             </a:r>
           </a:p>
           <a:p>
             <a:pPr lvl="2"/>
             <a:r>
-              <a:rPr lang="en-US" altLang="zh-TW" smtClean="0"/>
+              <a:rPr lang="en-US" altLang="zh-TW"/>
               <a:t>Third level</a:t>
             </a:r>
           </a:p>
           <a:p>
             <a:pPr lvl="3"/>
             <a:r>
-              <a:rPr lang="en-US" altLang="zh-TW" smtClean="0"/>
+              <a:rPr lang="en-US" altLang="zh-TW"/>
               <a:t>Fourth level</a:t>
             </a:r>
           </a:p>
           <a:p>
             <a:pPr lvl="4"/>
             <a:r>
-              <a:rPr lang="en-US" altLang="zh-TW" smtClean="0"/>
+              <a:rPr lang="en-US" altLang="zh-TW"/>
               <a:t>Fifth level</a:t>
             </a:r>
             <a:endParaRPr lang="zh-TW" altLang="en-US"/>
@@ -1292,35 +1301,35 @@
           <a:p>
             <a:pPr lvl="0"/>
             <a:r>
-              <a:rPr lang="en-US" altLang="zh-TW" smtClean="0"/>
+              <a:rPr lang="en-US" altLang="zh-TW"/>
               <a:t>Edit Master text styles</a:t>
             </a:r>
           </a:p>
           <a:p>
             <a:pPr lvl="1"/>
             <a:r>
-              <a:rPr lang="en-US" altLang="zh-TW" smtClean="0"/>
+              <a:rPr lang="en-US" altLang="zh-TW"/>
               <a:t>Second level</a:t>
             </a:r>
           </a:p>
           <a:p>
             <a:pPr lvl="2"/>
             <a:r>
-              <a:rPr lang="en-US" altLang="zh-TW" smtClean="0"/>
+              <a:rPr lang="en-US" altLang="zh-TW"/>
               <a:t>Third level</a:t>
             </a:r>
           </a:p>
           <a:p>
             <a:pPr lvl="3"/>
             <a:r>
-              <a:rPr lang="en-US" altLang="zh-TW" smtClean="0"/>
+              <a:rPr lang="en-US" altLang="zh-TW"/>
               <a:t>Fourth level</a:t>
             </a:r>
           </a:p>
           <a:p>
             <a:pPr lvl="4"/>
             <a:r>
-              <a:rPr lang="en-US" altLang="zh-TW" smtClean="0"/>
+              <a:rPr lang="en-US" altLang="zh-TW"/>
               <a:t>Fifth level</a:t>
             </a:r>
             <a:endParaRPr lang="zh-TW" altLang="en-US"/>
@@ -1344,7 +1353,7 @@
           <a:p>
             <a:fld id="{80E57162-8466-4E04-98B9-5A5DF6984273}" type="datetimeFigureOut">
               <a:rPr lang="vi-VN" smtClean="0"/>
-              <a:t>18/07/2020</a:t>
+              <a:t>31/05/2025</a:t>
             </a:fld>
             <a:endParaRPr lang="vi-VN"/>
           </a:p>
@@ -1442,7 +1451,7 @@
           </a:lstStyle>
           <a:p>
             <a:r>
-              <a:rPr lang="en-US" altLang="zh-TW" smtClean="0"/>
+              <a:rPr lang="en-US" altLang="zh-TW"/>
               <a:t>Click to edit Master title style</a:t>
             </a:r>
             <a:endParaRPr lang="zh-TW" altLang="en-US"/>
@@ -1508,7 +1517,7 @@
           <a:p>
             <a:pPr lvl="0"/>
             <a:r>
-              <a:rPr lang="en-US" altLang="zh-TW" smtClean="0"/>
+              <a:rPr lang="en-US" altLang="zh-TW"/>
               <a:t>Edit Master text styles</a:t>
             </a:r>
           </a:p>
@@ -1564,35 +1573,35 @@
           <a:p>
             <a:pPr lvl="0"/>
             <a:r>
-              <a:rPr lang="en-US" altLang="zh-TW" smtClean="0"/>
+              <a:rPr lang="en-US" altLang="zh-TW"/>
               <a:t>Edit Master text styles</a:t>
             </a:r>
           </a:p>
           <a:p>
             <a:pPr lvl="1"/>
             <a:r>
-              <a:rPr lang="en-US" altLang="zh-TW" smtClean="0"/>
+              <a:rPr lang="en-US" altLang="zh-TW"/>
               <a:t>Second level</a:t>
             </a:r>
           </a:p>
           <a:p>
             <a:pPr lvl="2"/>
             <a:r>
-              <a:rPr lang="en-US" altLang="zh-TW" smtClean="0"/>
+              <a:rPr lang="en-US" altLang="zh-TW"/>
               <a:t>Third level</a:t>
             </a:r>
           </a:p>
           <a:p>
             <a:pPr lvl="3"/>
             <a:r>
-              <a:rPr lang="en-US" altLang="zh-TW" smtClean="0"/>
+              <a:rPr lang="en-US" altLang="zh-TW"/>
               <a:t>Fourth level</a:t>
             </a:r>
           </a:p>
           <a:p>
             <a:pPr lvl="4"/>
             <a:r>
-              <a:rPr lang="en-US" altLang="zh-TW" smtClean="0"/>
+              <a:rPr lang="en-US" altLang="zh-TW"/>
               <a:t>Fifth level</a:t>
             </a:r>
             <a:endParaRPr lang="zh-TW" altLang="en-US"/>
@@ -1658,7 +1667,7 @@
           <a:p>
             <a:pPr lvl="0"/>
             <a:r>
-              <a:rPr lang="en-US" altLang="zh-TW" smtClean="0"/>
+              <a:rPr lang="en-US" altLang="zh-TW"/>
               <a:t>Edit Master text styles</a:t>
             </a:r>
           </a:p>
@@ -1714,35 +1723,35 @@
           <a:p>
             <a:pPr lvl="0"/>
             <a:r>
-              <a:rPr lang="en-US" altLang="zh-TW" smtClean="0"/>
+              <a:rPr lang="en-US" altLang="zh-TW"/>
               <a:t>Edit Master text styles</a:t>
             </a:r>
           </a:p>
           <a:p>
             <a:pPr lvl="1"/>
             <a:r>
-              <a:rPr lang="en-US" altLang="zh-TW" smtClean="0"/>
+              <a:rPr lang="en-US" altLang="zh-TW"/>
               <a:t>Second level</a:t>
             </a:r>
           </a:p>
           <a:p>
             <a:pPr lvl="2"/>
             <a:r>
-              <a:rPr lang="en-US" altLang="zh-TW" smtClean="0"/>
+              <a:rPr lang="en-US" altLang="zh-TW"/>
               <a:t>Third level</a:t>
             </a:r>
           </a:p>
           <a:p>
             <a:pPr lvl="3"/>
             <a:r>
-              <a:rPr lang="en-US" altLang="zh-TW" smtClean="0"/>
+              <a:rPr lang="en-US" altLang="zh-TW"/>
               <a:t>Fourth level</a:t>
             </a:r>
           </a:p>
           <a:p>
             <a:pPr lvl="4"/>
             <a:r>
-              <a:rPr lang="en-US" altLang="zh-TW" smtClean="0"/>
+              <a:rPr lang="en-US" altLang="zh-TW"/>
               <a:t>Fifth level</a:t>
             </a:r>
             <a:endParaRPr lang="zh-TW" altLang="en-US"/>
@@ -1766,7 +1775,7 @@
           <a:p>
             <a:fld id="{80E57162-8466-4E04-98B9-5A5DF6984273}" type="datetimeFigureOut">
               <a:rPr lang="vi-VN" smtClean="0"/>
-              <a:t>18/07/2020</a:t>
+              <a:t>31/05/2025</a:t>
             </a:fld>
             <a:endParaRPr lang="vi-VN"/>
           </a:p>
@@ -1860,7 +1869,7 @@
           <a:lstStyle/>
           <a:p>
             <a:r>
-              <a:rPr lang="en-US" altLang="zh-TW" smtClean="0"/>
+              <a:rPr lang="en-US" altLang="zh-TW"/>
               <a:t>Click to edit Master title style</a:t>
             </a:r>
             <a:endParaRPr lang="zh-TW" altLang="en-US"/>
@@ -1884,7 +1893,7 @@
           <a:p>
             <a:fld id="{80E57162-8466-4E04-98B9-5A5DF6984273}" type="datetimeFigureOut">
               <a:rPr lang="vi-VN" smtClean="0"/>
-              <a:t>18/07/2020</a:t>
+              <a:t>31/05/2025</a:t>
             </a:fld>
             <a:endParaRPr lang="vi-VN"/>
           </a:p>
@@ -1979,7 +1988,7 @@
           <a:p>
             <a:fld id="{80E57162-8466-4E04-98B9-5A5DF6984273}" type="datetimeFigureOut">
               <a:rPr lang="vi-VN" smtClean="0"/>
-              <a:t>18/07/2020</a:t>
+              <a:t>31/05/2025</a:t>
             </a:fld>
             <a:endParaRPr lang="vi-VN"/>
           </a:p>
@@ -2082,7 +2091,7 @@
           </a:lstStyle>
           <a:p>
             <a:r>
-              <a:rPr lang="en-US" altLang="zh-TW" smtClean="0"/>
+              <a:rPr lang="en-US" altLang="zh-TW"/>
               <a:t>Click to edit Master title style</a:t>
             </a:r>
             <a:endParaRPr lang="zh-TW" altLang="en-US"/>
@@ -2139,35 +2148,35 @@
           <a:p>
             <a:pPr lvl="0"/>
             <a:r>
-              <a:rPr lang="en-US" altLang="zh-TW" smtClean="0"/>
+              <a:rPr lang="en-US" altLang="zh-TW"/>
               <a:t>Edit Master text styles</a:t>
             </a:r>
           </a:p>
           <a:p>
             <a:pPr lvl="1"/>
             <a:r>
-              <a:rPr lang="en-US" altLang="zh-TW" smtClean="0"/>
+              <a:rPr lang="en-US" altLang="zh-TW"/>
               <a:t>Second level</a:t>
             </a:r>
           </a:p>
           <a:p>
             <a:pPr lvl="2"/>
             <a:r>
-              <a:rPr lang="en-US" altLang="zh-TW" smtClean="0"/>
+              <a:rPr lang="en-US" altLang="zh-TW"/>
               <a:t>Third level</a:t>
             </a:r>
           </a:p>
           <a:p>
             <a:pPr lvl="3"/>
             <a:r>
-              <a:rPr lang="en-US" altLang="zh-TW" smtClean="0"/>
+              <a:rPr lang="en-US" altLang="zh-TW"/>
               <a:t>Fourth level</a:t>
             </a:r>
           </a:p>
           <a:p>
             <a:pPr lvl="4"/>
             <a:r>
-              <a:rPr lang="en-US" altLang="zh-TW" smtClean="0"/>
+              <a:rPr lang="en-US" altLang="zh-TW"/>
               <a:t>Fifth level</a:t>
             </a:r>
             <a:endParaRPr lang="zh-TW" altLang="en-US"/>
@@ -2233,7 +2242,7 @@
           <a:p>
             <a:pPr lvl="0"/>
             <a:r>
-              <a:rPr lang="en-US" altLang="zh-TW" smtClean="0"/>
+              <a:rPr lang="en-US" altLang="zh-TW"/>
               <a:t>Edit Master text styles</a:t>
             </a:r>
           </a:p>
@@ -2256,7 +2265,7 @@
           <a:p>
             <a:fld id="{80E57162-8466-4E04-98B9-5A5DF6984273}" type="datetimeFigureOut">
               <a:rPr lang="vi-VN" smtClean="0"/>
-              <a:t>18/07/2020</a:t>
+              <a:t>31/05/2025</a:t>
             </a:fld>
             <a:endParaRPr lang="vi-VN"/>
           </a:p>
@@ -2359,7 +2368,7 @@
           </a:lstStyle>
           <a:p>
             <a:r>
-              <a:rPr lang="en-US" altLang="zh-TW" smtClean="0"/>
+              <a:rPr lang="en-US" altLang="zh-TW"/>
               <a:t>Click to edit Master title style</a:t>
             </a:r>
             <a:endParaRPr lang="zh-TW" altLang="en-US"/>
@@ -2424,7 +2433,7 @@
           </a:lstStyle>
           <a:p>
             <a:r>
-              <a:rPr lang="en-US" altLang="zh-TW" smtClean="0"/>
+              <a:rPr lang="en-US" altLang="zh-TW"/>
               <a:t>Click icon to add picture</a:t>
             </a:r>
             <a:endParaRPr lang="zh-TW" altLang="en-US"/>
@@ -2490,7 +2499,7 @@
           <a:p>
             <a:pPr lvl="0"/>
             <a:r>
-              <a:rPr lang="en-US" altLang="zh-TW" smtClean="0"/>
+              <a:rPr lang="en-US" altLang="zh-TW"/>
               <a:t>Edit Master text styles</a:t>
             </a:r>
           </a:p>
@@ -2513,7 +2522,7 @@
           <a:p>
             <a:fld id="{80E57162-8466-4E04-98B9-5A5DF6984273}" type="datetimeFigureOut">
               <a:rPr lang="vi-VN" smtClean="0"/>
-              <a:t>18/07/2020</a:t>
+              <a:t>31/05/2025</a:t>
             </a:fld>
             <a:endParaRPr lang="vi-VN"/>
           </a:p>
@@ -2627,10 +2636,9 @@
           <a:lstStyle/>
           <a:p>
             <a:r>
-              <a:rPr lang="zh-TW" altLang="en-US" smtClean="0"/>
+              <a:rPr lang="zh-TW" altLang="en-US"/>
               <a:t>按一下以編輯母片標題樣式</a:t>
             </a:r>
-            <a:endParaRPr lang="zh-TW" altLang="en-US"/>
           </a:p>
         </p:txBody>
       </p:sp>
@@ -2661,38 +2669,37 @@
           <a:p>
             <a:pPr lvl="0"/>
             <a:r>
-              <a:rPr lang="zh-TW" altLang="en-US" smtClean="0"/>
+              <a:rPr lang="zh-TW" altLang="en-US"/>
               <a:t>按一下以編輯母片文字樣式</a:t>
             </a:r>
           </a:p>
           <a:p>
             <a:pPr lvl="1"/>
             <a:r>
-              <a:rPr lang="zh-TW" altLang="en-US" smtClean="0"/>
+              <a:rPr lang="zh-TW" altLang="en-US"/>
               <a:t>第二層</a:t>
             </a:r>
           </a:p>
           <a:p>
             <a:pPr lvl="2"/>
             <a:r>
-              <a:rPr lang="zh-TW" altLang="en-US" smtClean="0"/>
+              <a:rPr lang="zh-TW" altLang="en-US"/>
               <a:t>第三層</a:t>
             </a:r>
           </a:p>
           <a:p>
             <a:pPr lvl="3"/>
             <a:r>
-              <a:rPr lang="zh-TW" altLang="en-US" smtClean="0"/>
+              <a:rPr lang="zh-TW" altLang="en-US"/>
               <a:t>第四層</a:t>
             </a:r>
           </a:p>
           <a:p>
             <a:pPr lvl="4"/>
             <a:r>
-              <a:rPr lang="zh-TW" altLang="en-US" smtClean="0"/>
+              <a:rPr lang="zh-TW" altLang="en-US"/>
               <a:t>第五層</a:t>
             </a:r>
-            <a:endParaRPr lang="zh-TW" altLang="en-US"/>
           </a:p>
         </p:txBody>
       </p:sp>
@@ -2731,7 +2738,7 @@
           <a:p>
             <a:fld id="{80E57162-8466-4E04-98B9-5A5DF6984273}" type="datetimeFigureOut">
               <a:rPr lang="vi-VN" smtClean="0"/>
-              <a:t>18/07/2020</a:t>
+              <a:t>31/05/2025</a:t>
             </a:fld>
             <a:endParaRPr lang="vi-VN"/>
           </a:p>
@@ -3094,7 +3101,13 @@
   <p:cSld>
     <p:spTree>
       <p:nvGrpSpPr>
-        <p:cNvPr id="1" name=""/>
+        <p:cNvPr id="1" name="">
+          <a:extLst>
+            <a:ext uri="{FF2B5EF4-FFF2-40B4-BE49-F238E27FC236}">
+              <a16:creationId xmlns:a16="http://schemas.microsoft.com/office/drawing/2014/main" id="{5F20F3D7-EDDF-CE30-9060-314A88E3730B}"/>
+            </a:ext>
+          </a:extLst>
+        </p:cNvPr>
         <p:cNvGrpSpPr/>
         <p:nvPr/>
       </p:nvGrpSpPr>
@@ -3108,7 +3121,13 @@
       </p:grpSpPr>
       <p:sp>
         <p:nvSpPr>
-          <p:cNvPr id="2" name="Title 1"/>
+          <p:cNvPr id="4" name="標題 3">
+            <a:extLst>
+              <a:ext uri="{FF2B5EF4-FFF2-40B4-BE49-F238E27FC236}">
+                <a16:creationId xmlns:a16="http://schemas.microsoft.com/office/drawing/2014/main" id="{CD6A41DD-B5E6-D530-EC0F-85726817D119}"/>
+              </a:ext>
+            </a:extLst>
+          </p:cNvPr>
           <p:cNvSpPr>
             <a:spLocks noGrp="1"/>
           </p:cNvSpPr>
@@ -3116,265 +3135,42 @@
             <p:ph type="title"/>
           </p:nvPr>
         </p:nvSpPr>
-        <p:spPr/>
+        <p:spPr>
+          <a:xfrm>
+            <a:off x="0" y="2660915"/>
+            <a:ext cx="12192000" cy="1143000"/>
+          </a:xfrm>
+        </p:spPr>
         <p:txBody>
           <a:bodyPr>
-            <a:normAutofit/>
+            <a:noAutofit/>
           </a:bodyPr>
           <a:lstStyle/>
           <a:p>
             <a:r>
-              <a:rPr lang="zh-TW" altLang="en-US" sz="4800" b="1" dirty="0">
-                <a:latin typeface="Microsoft JhengHei" panose="020B0604030504040204" pitchFamily="34" charset="-120"/>
-                <a:ea typeface="Microsoft JhengHei" panose="020B0604030504040204" pitchFamily="34" charset="-120"/>
+              <a:rPr lang="zh-TW" altLang="en-US" sz="7200" b="1" i="1" dirty="0">
+                <a:solidFill>
+                  <a:srgbClr val="000066"/>
+                </a:solidFill>
+                <a:effectLst>
+                  <a:outerShdw blurRad="38100" dist="38100" dir="2700000" algn="tl">
+                    <a:srgbClr val="000000">
+                      <a:alpha val="43137"/>
+                    </a:srgbClr>
+                  </a:outerShdw>
+                </a:effectLst>
+                <a:latin typeface="微軟正黑體" pitchFamily="34" charset="-120"/>
+                <a:ea typeface="微軟正黑體" pitchFamily="34" charset="-120"/>
               </a:rPr>
-              <a:t>神</a:t>
-            </a:r>
-            <a:r>
-              <a:rPr lang="zh-TW" altLang="en-US" sz="4800" b="1" dirty="0" smtClean="0">
-                <a:latin typeface="Microsoft JhengHei" panose="020B0604030504040204" pitchFamily="34" charset="-120"/>
-                <a:ea typeface="Microsoft JhengHei" panose="020B0604030504040204" pitchFamily="34" charset="-120"/>
-              </a:rPr>
-              <a:t>哪  我</a:t>
-            </a:r>
-            <a:r>
-              <a:rPr lang="zh-TW" altLang="en-US" sz="4800" b="1" dirty="0">
-                <a:latin typeface="Microsoft JhengHei" panose="020B0604030504040204" pitchFamily="34" charset="-120"/>
-                <a:ea typeface="Microsoft JhengHei" panose="020B0604030504040204" pitchFamily="34" charset="-120"/>
-              </a:rPr>
-              <a:t>要讚</a:t>
-            </a:r>
-            <a:r>
-              <a:rPr lang="zh-TW" altLang="en-US" sz="4800" b="1" dirty="0" smtClean="0">
-                <a:latin typeface="Microsoft JhengHei" panose="020B0604030504040204" pitchFamily="34" charset="-120"/>
-                <a:ea typeface="Microsoft JhengHei" panose="020B0604030504040204" pitchFamily="34" charset="-120"/>
-              </a:rPr>
-              <a:t>美</a:t>
-            </a:r>
-            <a:r>
-              <a:rPr lang="zh-CN" altLang="en-US" sz="4800" b="1" dirty="0">
-                <a:latin typeface="Microsoft JhengHei" panose="020B0604030504040204" pitchFamily="34" charset="-120"/>
-                <a:ea typeface="Microsoft JhengHei" panose="020B0604030504040204" pitchFamily="34" charset="-120"/>
-              </a:rPr>
-              <a:t>袮</a:t>
-            </a:r>
-            <a:endParaRPr lang="vi-VN" sz="4800" b="1" dirty="0">
-              <a:ea typeface="Microsoft JhengHei" panose="020B0604030504040204" pitchFamily="34" charset="-120"/>
-            </a:endParaRPr>
-          </a:p>
-        </p:txBody>
-      </p:sp>
-      <p:sp>
-        <p:nvSpPr>
-          <p:cNvPr id="3" name="Content Placeholder 2"/>
-          <p:cNvSpPr>
-            <a:spLocks noGrp="1"/>
-          </p:cNvSpPr>
-          <p:nvPr>
-            <p:ph idx="1"/>
-          </p:nvPr>
-        </p:nvSpPr>
-        <p:spPr/>
-        <p:txBody>
-          <a:bodyPr>
-            <a:normAutofit/>
-          </a:bodyPr>
-          <a:lstStyle/>
-          <a:p>
-            <a:pPr marL="0" indent="0" algn="ctr">
-              <a:buNone/>
-            </a:pPr>
-            <a:r>
-              <a:rPr lang="zh-TW" altLang="en-US" sz="5400" b="1" dirty="0">
-                <a:latin typeface="Microsoft JhengHei" panose="020B0604030504040204" pitchFamily="34" charset="-120"/>
-                <a:ea typeface="Microsoft JhengHei" panose="020B0604030504040204" pitchFamily="34" charset="-120"/>
-              </a:rPr>
-              <a:t>天</a:t>
-            </a:r>
-            <a:r>
-              <a:rPr lang="zh-TW" altLang="en-US" sz="5400" b="1" dirty="0" smtClean="0">
-                <a:latin typeface="Microsoft JhengHei" panose="020B0604030504040204" pitchFamily="34" charset="-120"/>
-                <a:ea typeface="Microsoft JhengHei" panose="020B0604030504040204" pitchFamily="34" charset="-120"/>
-              </a:rPr>
-              <a:t>屬</a:t>
-            </a:r>
-            <a:r>
-              <a:rPr lang="zh-CN" altLang="en-US" sz="5400" b="1" dirty="0" smtClean="0">
-                <a:latin typeface="Microsoft JhengHei" panose="020B0604030504040204" pitchFamily="34" charset="-120"/>
-                <a:ea typeface="Microsoft JhengHei" panose="020B0604030504040204" pitchFamily="34" charset="-120"/>
-              </a:rPr>
-              <a:t>袮  </a:t>
-            </a:r>
-            <a:r>
-              <a:rPr lang="zh-TW" altLang="en-US" sz="5400" b="1" dirty="0" smtClean="0">
-                <a:latin typeface="Microsoft JhengHei" panose="020B0604030504040204" pitchFamily="34" charset="-120"/>
-                <a:ea typeface="Microsoft JhengHei" panose="020B0604030504040204" pitchFamily="34" charset="-120"/>
-              </a:rPr>
-              <a:t>地</a:t>
-            </a:r>
-            <a:r>
-              <a:rPr lang="zh-TW" altLang="en-US" sz="5400" b="1" dirty="0">
-                <a:latin typeface="Microsoft JhengHei" panose="020B0604030504040204" pitchFamily="34" charset="-120"/>
-                <a:ea typeface="Microsoft JhengHei" panose="020B0604030504040204" pitchFamily="34" charset="-120"/>
-              </a:rPr>
-              <a:t>也</a:t>
-            </a:r>
-            <a:r>
-              <a:rPr lang="zh-TW" altLang="en-US" sz="5400" b="1" dirty="0" smtClean="0">
-                <a:latin typeface="Microsoft JhengHei" panose="020B0604030504040204" pitchFamily="34" charset="-120"/>
-                <a:ea typeface="Microsoft JhengHei" panose="020B0604030504040204" pitchFamily="34" charset="-120"/>
-              </a:rPr>
-              <a:t>屬</a:t>
-            </a:r>
-            <a:r>
-              <a:rPr lang="zh-CN" altLang="en-US" sz="5400" b="1" dirty="0">
-                <a:latin typeface="Microsoft JhengHei" panose="020B0604030504040204" pitchFamily="34" charset="-120"/>
-                <a:ea typeface="Microsoft JhengHei" panose="020B0604030504040204" pitchFamily="34" charset="-120"/>
-              </a:rPr>
-              <a:t>袮</a:t>
-            </a:r>
-            <a:endParaRPr lang="en-US" altLang="zh-TW" sz="5400" b="1" dirty="0" smtClean="0">
-              <a:latin typeface="Microsoft JhengHei" panose="020B0604030504040204" pitchFamily="34" charset="-120"/>
-              <a:ea typeface="Microsoft JhengHei" panose="020B0604030504040204" pitchFamily="34" charset="-120"/>
-            </a:endParaRPr>
-          </a:p>
-          <a:p>
-            <a:pPr marL="0" indent="0" algn="ctr">
-              <a:buNone/>
-            </a:pPr>
-            <a:r>
-              <a:rPr lang="zh-TW" altLang="en-US" sz="5400" b="1" dirty="0" smtClean="0">
-                <a:latin typeface="Microsoft JhengHei" panose="020B0604030504040204" pitchFamily="34" charset="-120"/>
-                <a:ea typeface="Microsoft JhengHei" panose="020B0604030504040204" pitchFamily="34" charset="-120"/>
-              </a:rPr>
-              <a:t>神哪  我</a:t>
-            </a:r>
-            <a:r>
-              <a:rPr lang="zh-TW" altLang="en-US" sz="5400" b="1" dirty="0">
-                <a:latin typeface="Microsoft JhengHei" panose="020B0604030504040204" pitchFamily="34" charset="-120"/>
-                <a:ea typeface="Microsoft JhengHei" panose="020B0604030504040204" pitchFamily="34" charset="-120"/>
-              </a:rPr>
-              <a:t>要讚</a:t>
-            </a:r>
-            <a:r>
-              <a:rPr lang="zh-TW" altLang="en-US" sz="5400" b="1" dirty="0" smtClean="0">
-                <a:latin typeface="Microsoft JhengHei" panose="020B0604030504040204" pitchFamily="34" charset="-120"/>
-                <a:ea typeface="Microsoft JhengHei" panose="020B0604030504040204" pitchFamily="34" charset="-120"/>
-              </a:rPr>
-              <a:t>美</a:t>
-            </a:r>
-            <a:r>
-              <a:rPr lang="zh-CN" altLang="en-US" sz="5400" b="1" dirty="0">
-                <a:latin typeface="Microsoft JhengHei" panose="020B0604030504040204" pitchFamily="34" charset="-120"/>
-                <a:ea typeface="Microsoft JhengHei" panose="020B0604030504040204" pitchFamily="34" charset="-120"/>
-              </a:rPr>
-              <a:t>袮</a:t>
-            </a:r>
-            <a:endParaRPr lang="en-US" altLang="zh-TW" sz="5400" b="1" dirty="0">
-              <a:latin typeface="Microsoft JhengHei" panose="020B0604030504040204" pitchFamily="34" charset="-120"/>
-              <a:ea typeface="Microsoft JhengHei" panose="020B0604030504040204" pitchFamily="34" charset="-120"/>
-            </a:endParaRPr>
-          </a:p>
-          <a:p>
-            <a:pPr marL="0" indent="0" algn="ctr">
-              <a:buNone/>
-            </a:pPr>
-            <a:r>
-              <a:rPr lang="zh-TW" altLang="en-US" sz="5400" b="1" dirty="0" smtClean="0">
-                <a:latin typeface="Microsoft JhengHei" panose="020B0604030504040204" pitchFamily="34" charset="-120"/>
-                <a:ea typeface="Microsoft JhengHei" panose="020B0604030504040204" pitchFamily="34" charset="-120"/>
-              </a:rPr>
-              <a:t>世</a:t>
-            </a:r>
-            <a:r>
-              <a:rPr lang="zh-TW" altLang="en-US" sz="5400" b="1" dirty="0">
-                <a:latin typeface="Microsoft JhengHei" panose="020B0604030504040204" pitchFamily="34" charset="-120"/>
-                <a:ea typeface="Microsoft JhengHei" panose="020B0604030504040204" pitchFamily="34" charset="-120"/>
-              </a:rPr>
-              <a:t>界</a:t>
-            </a:r>
-            <a:r>
-              <a:rPr lang="zh-TW" altLang="en-US" sz="5400" b="1" dirty="0" smtClean="0">
-                <a:latin typeface="Microsoft JhengHei" panose="020B0604030504040204" pitchFamily="34" charset="-120"/>
-                <a:ea typeface="Microsoft JhengHei" panose="020B0604030504040204" pitchFamily="34" charset="-120"/>
-              </a:rPr>
-              <a:t>屬</a:t>
-            </a:r>
-            <a:r>
-              <a:rPr lang="zh-CN" altLang="en-US" sz="5400" b="1" dirty="0" smtClean="0">
-                <a:latin typeface="Microsoft JhengHei" panose="020B0604030504040204" pitchFamily="34" charset="-120"/>
-                <a:ea typeface="Microsoft JhengHei" panose="020B0604030504040204" pitchFamily="34" charset="-120"/>
-              </a:rPr>
-              <a:t>袮  </a:t>
-            </a:r>
-            <a:r>
-              <a:rPr lang="zh-TW" altLang="en-US" sz="5400" b="1" dirty="0" smtClean="0">
-                <a:latin typeface="Microsoft JhengHei" panose="020B0604030504040204" pitchFamily="34" charset="-120"/>
-                <a:ea typeface="Microsoft JhengHei" panose="020B0604030504040204" pitchFamily="34" charset="-120"/>
-              </a:rPr>
-              <a:t>是</a:t>
-            </a:r>
-            <a:r>
-              <a:rPr lang="zh-CN" altLang="en-US" sz="5400" b="1" dirty="0">
-                <a:latin typeface="Microsoft JhengHei" panose="020B0604030504040204" pitchFamily="34" charset="-120"/>
-                <a:ea typeface="Microsoft JhengHei" panose="020B0604030504040204" pitchFamily="34" charset="-120"/>
-              </a:rPr>
-              <a:t>袮</a:t>
-            </a:r>
-            <a:r>
-              <a:rPr lang="zh-TW" altLang="en-US" sz="5400" b="1" dirty="0" smtClean="0">
-                <a:latin typeface="Microsoft JhengHei" panose="020B0604030504040204" pitchFamily="34" charset="-120"/>
-                <a:ea typeface="Microsoft JhengHei" panose="020B0604030504040204" pitchFamily="34" charset="-120"/>
-              </a:rPr>
-              <a:t>建立</a:t>
-            </a:r>
-            <a:endParaRPr lang="en-US" altLang="zh-TW" sz="5400" b="1" dirty="0" smtClean="0">
-              <a:latin typeface="Microsoft JhengHei" panose="020B0604030504040204" pitchFamily="34" charset="-120"/>
-              <a:ea typeface="Microsoft JhengHei" panose="020B0604030504040204" pitchFamily="34" charset="-120"/>
-            </a:endParaRPr>
-          </a:p>
-          <a:p>
-            <a:pPr marL="0" indent="0" algn="ctr">
-              <a:buNone/>
-            </a:pPr>
-            <a:r>
-              <a:rPr lang="zh-TW" altLang="en-US" sz="5400" b="1" dirty="0" smtClean="0">
-                <a:latin typeface="Microsoft JhengHei" panose="020B0604030504040204" pitchFamily="34" charset="-120"/>
-                <a:ea typeface="Microsoft JhengHei" panose="020B0604030504040204" pitchFamily="34" charset="-120"/>
-              </a:rPr>
-              <a:t>神哪  我</a:t>
-            </a:r>
-            <a:r>
-              <a:rPr lang="zh-TW" altLang="en-US" sz="5400" b="1" dirty="0">
-                <a:latin typeface="Microsoft JhengHei" panose="020B0604030504040204" pitchFamily="34" charset="-120"/>
-                <a:ea typeface="Microsoft JhengHei" panose="020B0604030504040204" pitchFamily="34" charset="-120"/>
-              </a:rPr>
-              <a:t>要讚</a:t>
-            </a:r>
-            <a:r>
-              <a:rPr lang="zh-TW" altLang="en-US" sz="5400" b="1" dirty="0" smtClean="0">
-                <a:latin typeface="Microsoft JhengHei" panose="020B0604030504040204" pitchFamily="34" charset="-120"/>
-                <a:ea typeface="Microsoft JhengHei" panose="020B0604030504040204" pitchFamily="34" charset="-120"/>
-              </a:rPr>
-              <a:t>美</a:t>
-            </a:r>
-            <a:r>
-              <a:rPr lang="zh-CN" altLang="en-US" sz="5400" b="1" dirty="0">
-                <a:latin typeface="Microsoft JhengHei" panose="020B0604030504040204" pitchFamily="34" charset="-120"/>
-                <a:ea typeface="Microsoft JhengHei" panose="020B0604030504040204" pitchFamily="34" charset="-120"/>
-              </a:rPr>
-              <a:t>袮</a:t>
-            </a:r>
-            <a:endParaRPr lang="vi-VN" sz="5400" b="1" dirty="0">
-              <a:ea typeface="Microsoft JhengHei" panose="020B0604030504040204" pitchFamily="34" charset="-120"/>
-            </a:endParaRPr>
+              <a:t>神哪  我要讚美祢</a:t>
+            </a:r>
           </a:p>
         </p:txBody>
       </p:sp>
     </p:spTree>
     <p:extLst>
       <p:ext uri="{BB962C8B-B14F-4D97-AF65-F5344CB8AC3E}">
-        <p14:creationId xmlns:p14="http://schemas.microsoft.com/office/powerpoint/2010/main" val="3777905717"/>
+        <p14:creationId xmlns:p14="http://schemas.microsoft.com/office/powerpoint/2010/main" val="388492399"/>
       </p:ext>
     </p:extLst>
   </p:cSld>
@@ -3389,7 +3185,13 @@
   <p:cSld>
     <p:spTree>
       <p:nvGrpSpPr>
-        <p:cNvPr id="1" name=""/>
+        <p:cNvPr id="1" name="">
+          <a:extLst>
+            <a:ext uri="{FF2B5EF4-FFF2-40B4-BE49-F238E27FC236}">
+              <a16:creationId xmlns:a16="http://schemas.microsoft.com/office/drawing/2014/main" id="{499F6A04-361B-D03C-72FC-83746A3861FC}"/>
+            </a:ext>
+          </a:extLst>
+        </p:cNvPr>
         <p:cNvGrpSpPr/>
         <p:nvPr/>
       </p:nvGrpSpPr>
@@ -3403,272 +3205,126 @@
       </p:grpSpPr>
       <p:sp>
         <p:nvSpPr>
-          <p:cNvPr id="2" name="Title 1"/>
-          <p:cNvSpPr>
-            <a:spLocks noGrp="1"/>
-          </p:cNvSpPr>
-          <p:nvPr>
-            <p:ph type="title"/>
-          </p:nvPr>
-        </p:nvSpPr>
-        <p:spPr/>
-        <p:txBody>
-          <a:bodyPr>
+          <p:cNvPr id="5" name="內容版面配置區 4">
+            <a:extLst>
+              <a:ext uri="{FF2B5EF4-FFF2-40B4-BE49-F238E27FC236}">
+                <a16:creationId xmlns:a16="http://schemas.microsoft.com/office/drawing/2014/main" id="{EE77592B-EE8B-614D-4160-CDFC7BCE80DB}"/>
+              </a:ext>
+            </a:extLst>
+          </p:cNvPr>
+          <p:cNvSpPr>
+            <a:spLocks noGrp="1"/>
+          </p:cNvSpPr>
+          <p:nvPr>
+            <p:ph idx="1"/>
+          </p:nvPr>
+        </p:nvSpPr>
+        <p:spPr>
+          <a:xfrm>
+            <a:off x="0" y="2084853"/>
+            <a:ext cx="12192000" cy="2404863"/>
+          </a:xfrm>
+        </p:spPr>
+        <p:txBody>
+          <a:bodyPr anchor="ctr">
             <a:normAutofit/>
           </a:bodyPr>
           <a:lstStyle/>
           <a:p>
-            <a:r>
-              <a:rPr lang="zh-TW" altLang="en-US" sz="4800" b="1" dirty="0">
+            <a:pPr algn="ctr">
+              <a:buNone/>
+            </a:pPr>
+            <a:r>
+              <a:rPr lang="zh-TW" altLang="en-US" sz="6400" b="1" dirty="0">
+                <a:solidFill>
+                  <a:srgbClr val="000066"/>
+                </a:solidFill>
+                <a:latin typeface="微軟正黑體" pitchFamily="34" charset="-120"/>
+                <a:ea typeface="微軟正黑體" pitchFamily="34" charset="-120"/>
+              </a:rPr>
+              <a:t>天屬祢  地也屬祢</a:t>
+            </a:r>
+          </a:p>
+          <a:p>
+            <a:pPr algn="ctr">
+              <a:buNone/>
+            </a:pPr>
+            <a:r>
+              <a:rPr lang="zh-TW" altLang="en-US" sz="6400" b="1" dirty="0">
+                <a:solidFill>
+                  <a:srgbClr val="000066"/>
+                </a:solidFill>
+                <a:latin typeface="微軟正黑體" pitchFamily="34" charset="-120"/>
+                <a:ea typeface="微軟正黑體" pitchFamily="34" charset="-120"/>
+              </a:rPr>
+              <a:t>神哪  我要讚美祢</a:t>
+            </a:r>
+          </a:p>
+        </p:txBody>
+      </p:sp>
+      <p:sp>
+        <p:nvSpPr>
+          <p:cNvPr id="3" name="TextBox 2">
+            <a:extLst>
+              <a:ext uri="{FF2B5EF4-FFF2-40B4-BE49-F238E27FC236}">
+                <a16:creationId xmlns:a16="http://schemas.microsoft.com/office/drawing/2014/main" id="{FA175DD0-F211-14DE-420F-4A50F79B6BD2}"/>
+              </a:ext>
+            </a:extLst>
+          </p:cNvPr>
+          <p:cNvSpPr txBox="1"/>
+          <p:nvPr/>
+        </p:nvSpPr>
+        <p:spPr>
+          <a:xfrm>
+            <a:off x="0" y="5157194"/>
+            <a:ext cx="12192000" cy="584775"/>
+          </a:xfrm>
+          <a:prstGeom prst="rect">
+            <a:avLst/>
+          </a:prstGeom>
+          <a:noFill/>
+        </p:spPr>
+        <p:txBody>
+          <a:bodyPr wrap="square" rtlCol="0">
+            <a:spAutoFit/>
+          </a:bodyPr>
+          <a:lstStyle/>
+          <a:p>
+            <a:pPr algn="ctr"/>
+            <a:r>
+              <a:rPr lang="en-US" sz="3200" b="1" dirty="0">
+                <a:solidFill>
+                  <a:srgbClr val="000066"/>
+                </a:solidFill>
                 <a:latin typeface="Microsoft JhengHei" panose="020B0604030504040204" pitchFamily="34" charset="-120"/>
                 <a:ea typeface="Microsoft JhengHei" panose="020B0604030504040204" pitchFamily="34" charset="-120"/>
               </a:rPr>
-              <a:t>神</a:t>
-            </a:r>
-            <a:r>
-              <a:rPr lang="zh-TW" altLang="en-US" sz="4800" b="1" dirty="0" smtClean="0">
+              <a:t>( </a:t>
+            </a:r>
+            <a:r>
+              <a:rPr lang="zh-CN" altLang="en-US" sz="3200" b="1" dirty="0">
+                <a:solidFill>
+                  <a:srgbClr val="000066"/>
+                </a:solidFill>
                 <a:latin typeface="Microsoft JhengHei" panose="020B0604030504040204" pitchFamily="34" charset="-120"/>
                 <a:ea typeface="Microsoft JhengHei" panose="020B0604030504040204" pitchFamily="34" charset="-120"/>
               </a:rPr>
-              <a:t>哪  我</a:t>
-            </a:r>
-            <a:r>
-              <a:rPr lang="zh-TW" altLang="en-US" sz="4800" b="1" dirty="0">
+              <a:t>正歌</a:t>
+            </a:r>
+            <a:r>
+              <a:rPr lang="en-US" sz="3200" b="1" dirty="0">
+                <a:solidFill>
+                  <a:srgbClr val="000066"/>
+                </a:solidFill>
                 <a:latin typeface="Microsoft JhengHei" panose="020B0604030504040204" pitchFamily="34" charset="-120"/>
                 <a:ea typeface="Microsoft JhengHei" panose="020B0604030504040204" pitchFamily="34" charset="-120"/>
               </a:rPr>
-              <a:t>要讚</a:t>
-            </a:r>
-            <a:r>
-              <a:rPr lang="zh-TW" altLang="en-US" sz="4800" b="1" dirty="0" smtClean="0">
-                <a:latin typeface="Microsoft JhengHei" panose="020B0604030504040204" pitchFamily="34" charset="-120"/>
-                <a:ea typeface="Microsoft JhengHei" panose="020B0604030504040204" pitchFamily="34" charset="-120"/>
-              </a:rPr>
-              <a:t>美</a:t>
-            </a:r>
-            <a:r>
-              <a:rPr lang="zh-CN" altLang="en-US" sz="4800" b="1" dirty="0">
-                <a:latin typeface="Microsoft JhengHei" panose="020B0604030504040204" pitchFamily="34" charset="-120"/>
-                <a:ea typeface="Microsoft JhengHei" panose="020B0604030504040204" pitchFamily="34" charset="-120"/>
-              </a:rPr>
-              <a:t>袮</a:t>
-            </a:r>
-            <a:endParaRPr lang="vi-VN" sz="4800" b="1" dirty="0">
-              <a:ea typeface="Microsoft JhengHei" panose="020B0604030504040204" pitchFamily="34" charset="-120"/>
-            </a:endParaRPr>
-          </a:p>
-        </p:txBody>
-      </p:sp>
-      <p:sp>
-        <p:nvSpPr>
-          <p:cNvPr id="3" name="Content Placeholder 2"/>
-          <p:cNvSpPr>
-            <a:spLocks noGrp="1"/>
-          </p:cNvSpPr>
-          <p:nvPr>
-            <p:ph idx="1"/>
-          </p:nvPr>
-        </p:nvSpPr>
-        <p:spPr/>
-        <p:txBody>
-          <a:bodyPr>
-            <a:normAutofit/>
-          </a:bodyPr>
-          <a:lstStyle/>
-          <a:p>
-            <a:pPr marL="0" indent="0" algn="ctr">
-              <a:buNone/>
-            </a:pPr>
-            <a:r>
-              <a:rPr lang="zh-TW" altLang="en-US" sz="5400" b="1" dirty="0">
-                <a:latin typeface="Microsoft JhengHei" panose="020B0604030504040204" pitchFamily="34" charset="-120"/>
-                <a:ea typeface="Microsoft JhengHei" panose="020B0604030504040204" pitchFamily="34" charset="-120"/>
-              </a:rPr>
-              <a:t>南北</a:t>
-            </a:r>
-            <a:r>
-              <a:rPr lang="zh-TW" altLang="en-US" sz="5400" b="1" dirty="0" smtClean="0">
-                <a:latin typeface="Microsoft JhengHei" panose="020B0604030504040204" pitchFamily="34" charset="-120"/>
-                <a:ea typeface="Microsoft JhengHei" panose="020B0604030504040204" pitchFamily="34" charset="-120"/>
-              </a:rPr>
-              <a:t>屬</a:t>
-            </a:r>
-            <a:r>
-              <a:rPr lang="zh-CN" altLang="en-US" sz="5400" b="1" dirty="0" smtClean="0">
-                <a:latin typeface="Microsoft JhengHei" panose="020B0604030504040204" pitchFamily="34" charset="-120"/>
-                <a:ea typeface="Microsoft JhengHei" panose="020B0604030504040204" pitchFamily="34" charset="-120"/>
-              </a:rPr>
-              <a:t>袮  </a:t>
-            </a:r>
-            <a:r>
-              <a:rPr lang="zh-TW" altLang="en-US" sz="5400" b="1" dirty="0" smtClean="0">
-                <a:latin typeface="Microsoft JhengHei" panose="020B0604030504040204" pitchFamily="34" charset="-120"/>
-                <a:ea typeface="Microsoft JhengHei" panose="020B0604030504040204" pitchFamily="34" charset="-120"/>
-              </a:rPr>
-              <a:t>是</a:t>
-            </a:r>
-            <a:r>
-              <a:rPr lang="zh-CN" altLang="en-US" sz="5400" b="1" dirty="0">
-                <a:latin typeface="Microsoft JhengHei" panose="020B0604030504040204" pitchFamily="34" charset="-120"/>
-                <a:ea typeface="Microsoft JhengHei" panose="020B0604030504040204" pitchFamily="34" charset="-120"/>
-              </a:rPr>
-              <a:t>袮</a:t>
-            </a:r>
-            <a:r>
-              <a:rPr lang="zh-TW" altLang="en-US" sz="5400" b="1" dirty="0" smtClean="0">
-                <a:latin typeface="Microsoft JhengHei" panose="020B0604030504040204" pitchFamily="34" charset="-120"/>
-                <a:ea typeface="Microsoft JhengHei" panose="020B0604030504040204" pitchFamily="34" charset="-120"/>
-              </a:rPr>
-              <a:t>所</a:t>
-            </a:r>
-            <a:r>
-              <a:rPr lang="zh-TW" altLang="en-US" sz="5400" b="1" dirty="0">
-                <a:latin typeface="Microsoft JhengHei" panose="020B0604030504040204" pitchFamily="34" charset="-120"/>
-                <a:ea typeface="Microsoft JhengHei" panose="020B0604030504040204" pitchFamily="34" charset="-120"/>
-              </a:rPr>
-              <a:t>定</a:t>
-            </a:r>
-            <a:endParaRPr lang="en-US" altLang="zh-TW" sz="5400" b="1" dirty="0">
-              <a:latin typeface="Microsoft JhengHei" panose="020B0604030504040204" pitchFamily="34" charset="-120"/>
-              <a:ea typeface="Microsoft JhengHei" panose="020B0604030504040204" pitchFamily="34" charset="-120"/>
-            </a:endParaRPr>
-          </a:p>
-          <a:p>
-            <a:pPr marL="0" indent="0" algn="ctr">
-              <a:buNone/>
-            </a:pPr>
-            <a:r>
-              <a:rPr lang="zh-TW" altLang="en-US" sz="5400" b="1" dirty="0">
-                <a:latin typeface="Microsoft JhengHei" panose="020B0604030504040204" pitchFamily="34" charset="-120"/>
-                <a:ea typeface="Microsoft JhengHei" panose="020B0604030504040204" pitchFamily="34" charset="-120"/>
-              </a:rPr>
-              <a:t>神哪  我</a:t>
-            </a:r>
-            <a:r>
-              <a:rPr lang="zh-TW" altLang="en-US" sz="5400" b="1" dirty="0">
-                <a:latin typeface="Microsoft JhengHei" panose="020B0604030504040204" pitchFamily="34" charset="-120"/>
-                <a:ea typeface="Microsoft JhengHei" panose="020B0604030504040204" pitchFamily="34" charset="-120"/>
-              </a:rPr>
-              <a:t>要讚</a:t>
-            </a:r>
-            <a:r>
-              <a:rPr lang="zh-TW" altLang="en-US" sz="5400" b="1" dirty="0" smtClean="0">
-                <a:latin typeface="Microsoft JhengHei" panose="020B0604030504040204" pitchFamily="34" charset="-120"/>
-                <a:ea typeface="Microsoft JhengHei" panose="020B0604030504040204" pitchFamily="34" charset="-120"/>
-              </a:rPr>
-              <a:t>美</a:t>
-            </a:r>
-            <a:r>
-              <a:rPr lang="zh-CN" altLang="en-US" sz="5400" b="1" dirty="0">
-                <a:latin typeface="Microsoft JhengHei" panose="020B0604030504040204" pitchFamily="34" charset="-120"/>
-                <a:ea typeface="Microsoft JhengHei" panose="020B0604030504040204" pitchFamily="34" charset="-120"/>
-              </a:rPr>
-              <a:t>袮</a:t>
-            </a:r>
-            <a:endParaRPr lang="en-US" altLang="zh-TW" sz="5400" b="1" dirty="0">
-              <a:latin typeface="Microsoft JhengHei" panose="020B0604030504040204" pitchFamily="34" charset="-120"/>
-              <a:ea typeface="Microsoft JhengHei" panose="020B0604030504040204" pitchFamily="34" charset="-120"/>
-            </a:endParaRPr>
-          </a:p>
-          <a:p>
-            <a:pPr marL="0" indent="0" algn="ctr">
-              <a:buNone/>
-            </a:pPr>
-            <a:r>
-              <a:rPr lang="zh-TW" altLang="en-US" sz="5400" b="1" dirty="0">
-                <a:latin typeface="Microsoft JhengHei" panose="020B0604030504040204" pitchFamily="34" charset="-120"/>
-                <a:ea typeface="Microsoft JhengHei" panose="020B0604030504040204" pitchFamily="34" charset="-120"/>
-              </a:rPr>
-              <a:t>公</a:t>
-            </a:r>
-            <a:r>
-              <a:rPr lang="zh-TW" altLang="en-US" sz="5400" b="1" dirty="0">
-                <a:latin typeface="Microsoft JhengHei" panose="020B0604030504040204" pitchFamily="34" charset="-120"/>
-                <a:ea typeface="Microsoft JhengHei" panose="020B0604030504040204" pitchFamily="34" charset="-120"/>
-              </a:rPr>
-              <a:t>義</a:t>
-            </a:r>
-            <a:r>
-              <a:rPr lang="zh-TW" altLang="en-US" sz="5400" b="1" dirty="0" smtClean="0">
-                <a:latin typeface="Microsoft JhengHei" panose="020B0604030504040204" pitchFamily="34" charset="-120"/>
-                <a:ea typeface="Microsoft JhengHei" panose="020B0604030504040204" pitchFamily="34" charset="-120"/>
-              </a:rPr>
-              <a:t>屬</a:t>
-            </a:r>
-            <a:r>
-              <a:rPr lang="zh-CN" altLang="en-US" sz="5400" b="1" dirty="0" smtClean="0">
-                <a:latin typeface="Microsoft JhengHei" panose="020B0604030504040204" pitchFamily="34" charset="-120"/>
-                <a:ea typeface="Microsoft JhengHei" panose="020B0604030504040204" pitchFamily="34" charset="-120"/>
-              </a:rPr>
-              <a:t>袮  </a:t>
-            </a:r>
-            <a:r>
-              <a:rPr lang="zh-TW" altLang="en-US" sz="5400" b="1" dirty="0" smtClean="0">
-                <a:latin typeface="Microsoft JhengHei" panose="020B0604030504040204" pitchFamily="34" charset="-120"/>
-                <a:ea typeface="Microsoft JhengHei" panose="020B0604030504040204" pitchFamily="34" charset="-120"/>
-              </a:rPr>
-              <a:t>慈</a:t>
-            </a:r>
-            <a:r>
-              <a:rPr lang="zh-TW" altLang="en-US" sz="5400" b="1" dirty="0">
-                <a:latin typeface="Microsoft JhengHei" panose="020B0604030504040204" pitchFamily="34" charset="-120"/>
-                <a:ea typeface="Microsoft JhengHei" panose="020B0604030504040204" pitchFamily="34" charset="-120"/>
-              </a:rPr>
-              <a:t>愛</a:t>
-            </a:r>
-            <a:r>
-              <a:rPr lang="zh-TW" altLang="en-US" sz="5400" b="1" dirty="0" smtClean="0">
-                <a:latin typeface="Microsoft JhengHei" panose="020B0604030504040204" pitchFamily="34" charset="-120"/>
-                <a:ea typeface="Microsoft JhengHei" panose="020B0604030504040204" pitchFamily="34" charset="-120"/>
-              </a:rPr>
-              <a:t>屬</a:t>
-            </a:r>
-            <a:r>
-              <a:rPr lang="zh-CN" altLang="en-US" sz="5400" b="1" dirty="0">
-                <a:latin typeface="Microsoft JhengHei" panose="020B0604030504040204" pitchFamily="34" charset="-120"/>
-                <a:ea typeface="Microsoft JhengHei" panose="020B0604030504040204" pitchFamily="34" charset="-120"/>
-              </a:rPr>
-              <a:t>袮</a:t>
-            </a:r>
-            <a:endParaRPr lang="en-US" altLang="zh-TW" sz="5400" b="1" dirty="0">
-              <a:latin typeface="Microsoft JhengHei" panose="020B0604030504040204" pitchFamily="34" charset="-120"/>
-              <a:ea typeface="Microsoft JhengHei" panose="020B0604030504040204" pitchFamily="34" charset="-120"/>
-            </a:endParaRPr>
-          </a:p>
-          <a:p>
-            <a:pPr marL="0" indent="0" algn="ctr">
-              <a:buNone/>
-            </a:pPr>
-            <a:r>
-              <a:rPr lang="zh-TW" altLang="en-US" sz="5400" b="1" dirty="0">
-                <a:latin typeface="Microsoft JhengHei" panose="020B0604030504040204" pitchFamily="34" charset="-120"/>
-                <a:ea typeface="Microsoft JhengHei" panose="020B0604030504040204" pitchFamily="34" charset="-120"/>
-              </a:rPr>
-              <a:t>神哪  我</a:t>
-            </a:r>
-            <a:r>
-              <a:rPr lang="zh-TW" altLang="en-US" sz="5400" b="1" dirty="0">
-                <a:latin typeface="Microsoft JhengHei" panose="020B0604030504040204" pitchFamily="34" charset="-120"/>
-                <a:ea typeface="Microsoft JhengHei" panose="020B0604030504040204" pitchFamily="34" charset="-120"/>
-              </a:rPr>
-              <a:t>要讚</a:t>
-            </a:r>
-            <a:r>
-              <a:rPr lang="zh-TW" altLang="en-US" sz="5400" b="1" dirty="0" smtClean="0">
-                <a:latin typeface="Microsoft JhengHei" panose="020B0604030504040204" pitchFamily="34" charset="-120"/>
-                <a:ea typeface="Microsoft JhengHei" panose="020B0604030504040204" pitchFamily="34" charset="-120"/>
-              </a:rPr>
-              <a:t>美</a:t>
-            </a:r>
-            <a:r>
-              <a:rPr lang="zh-CN" altLang="en-US" sz="5400" b="1" dirty="0">
-                <a:latin typeface="Microsoft JhengHei" panose="020B0604030504040204" pitchFamily="34" charset="-120"/>
-                <a:ea typeface="Microsoft JhengHei" panose="020B0604030504040204" pitchFamily="34" charset="-120"/>
-              </a:rPr>
-              <a:t>袮</a:t>
-            </a:r>
-            <a:endParaRPr lang="vi-VN" sz="5400" b="1" dirty="0">
-              <a:latin typeface="Microsoft JhengHei" panose="020B0604030504040204" pitchFamily="34" charset="-120"/>
+              <a:t> )</a:t>
+            </a:r>
+            <a:endParaRPr lang="vi-VN" sz="3200" b="1" dirty="0">
+              <a:solidFill>
+                <a:srgbClr val="000066"/>
+              </a:solidFill>
               <a:ea typeface="Microsoft JhengHei" panose="020B0604030504040204" pitchFamily="34" charset="-120"/>
             </a:endParaRPr>
           </a:p>
@@ -3677,7 +3333,7 @@
     </p:spTree>
     <p:extLst>
       <p:ext uri="{BB962C8B-B14F-4D97-AF65-F5344CB8AC3E}">
-        <p14:creationId xmlns:p14="http://schemas.microsoft.com/office/powerpoint/2010/main" val="244978669"/>
+        <p14:creationId xmlns:p14="http://schemas.microsoft.com/office/powerpoint/2010/main" val="3885075056"/>
       </p:ext>
     </p:extLst>
   </p:cSld>
@@ -3692,7 +3348,13 @@
   <p:cSld>
     <p:spTree>
       <p:nvGrpSpPr>
-        <p:cNvPr id="1" name=""/>
+        <p:cNvPr id="1" name="">
+          <a:extLst>
+            <a:ext uri="{FF2B5EF4-FFF2-40B4-BE49-F238E27FC236}">
+              <a16:creationId xmlns:a16="http://schemas.microsoft.com/office/drawing/2014/main" id="{B9E821DD-1FA4-76CB-884C-677EEBA9CB22}"/>
+            </a:ext>
+          </a:extLst>
+        </p:cNvPr>
         <p:cNvGrpSpPr/>
         <p:nvPr/>
       </p:nvGrpSpPr>
@@ -3706,223 +3368,778 @@
       </p:grpSpPr>
       <p:sp>
         <p:nvSpPr>
-          <p:cNvPr id="2" name="Title 1"/>
-          <p:cNvSpPr>
-            <a:spLocks noGrp="1"/>
-          </p:cNvSpPr>
-          <p:nvPr>
-            <p:ph type="title"/>
-          </p:nvPr>
-        </p:nvSpPr>
-        <p:spPr/>
-        <p:txBody>
-          <a:bodyPr>
+          <p:cNvPr id="5" name="內容版面配置區 4">
+            <a:extLst>
+              <a:ext uri="{FF2B5EF4-FFF2-40B4-BE49-F238E27FC236}">
+                <a16:creationId xmlns:a16="http://schemas.microsoft.com/office/drawing/2014/main" id="{FE8C3E8D-E7B1-0250-BD99-76CC7A40D78F}"/>
+              </a:ext>
+            </a:extLst>
+          </p:cNvPr>
+          <p:cNvSpPr>
+            <a:spLocks noGrp="1"/>
+          </p:cNvSpPr>
+          <p:nvPr>
+            <p:ph idx="1"/>
+          </p:nvPr>
+        </p:nvSpPr>
+        <p:spPr>
+          <a:xfrm>
+            <a:off x="0" y="2084853"/>
+            <a:ext cx="12192000" cy="2404863"/>
+          </a:xfrm>
+        </p:spPr>
+        <p:txBody>
+          <a:bodyPr anchor="ctr">
             <a:normAutofit/>
           </a:bodyPr>
           <a:lstStyle/>
           <a:p>
-            <a:r>
-              <a:rPr lang="zh-TW" altLang="en-US" sz="4800" b="1" dirty="0">
+            <a:pPr algn="ctr">
+              <a:buNone/>
+            </a:pPr>
+            <a:r>
+              <a:rPr lang="zh-CN" altLang="en-US" sz="6400" b="1" dirty="0">
+                <a:solidFill>
+                  <a:srgbClr val="000066"/>
+                </a:solidFill>
+                <a:latin typeface="微軟正黑體" pitchFamily="34" charset="-120"/>
+                <a:ea typeface="微軟正黑體" pitchFamily="34" charset="-120"/>
+              </a:rPr>
+              <a:t>世界屬祢  是祢建立</a:t>
+            </a:r>
+          </a:p>
+          <a:p>
+            <a:pPr algn="ctr">
+              <a:buNone/>
+            </a:pPr>
+            <a:r>
+              <a:rPr lang="zh-CN" altLang="en-US" sz="6400" b="1" dirty="0">
+                <a:solidFill>
+                  <a:srgbClr val="000066"/>
+                </a:solidFill>
+                <a:latin typeface="微軟正黑體" pitchFamily="34" charset="-120"/>
+                <a:ea typeface="微軟正黑體" pitchFamily="34" charset="-120"/>
+              </a:rPr>
+              <a:t>神哪  我要讚美祢</a:t>
+            </a:r>
+          </a:p>
+        </p:txBody>
+      </p:sp>
+      <p:sp>
+        <p:nvSpPr>
+          <p:cNvPr id="3" name="TextBox 2">
+            <a:extLst>
+              <a:ext uri="{FF2B5EF4-FFF2-40B4-BE49-F238E27FC236}">
+                <a16:creationId xmlns:a16="http://schemas.microsoft.com/office/drawing/2014/main" id="{331F42AF-5DA2-6117-F720-CF2AE051E325}"/>
+              </a:ext>
+            </a:extLst>
+          </p:cNvPr>
+          <p:cNvSpPr txBox="1"/>
+          <p:nvPr/>
+        </p:nvSpPr>
+        <p:spPr>
+          <a:xfrm>
+            <a:off x="0" y="5157194"/>
+            <a:ext cx="12192000" cy="584775"/>
+          </a:xfrm>
+          <a:prstGeom prst="rect">
+            <a:avLst/>
+          </a:prstGeom>
+          <a:noFill/>
+        </p:spPr>
+        <p:txBody>
+          <a:bodyPr wrap="square" rtlCol="0">
+            <a:spAutoFit/>
+          </a:bodyPr>
+          <a:lstStyle/>
+          <a:p>
+            <a:pPr algn="ctr"/>
+            <a:r>
+              <a:rPr lang="en-US" sz="3200" b="1" dirty="0">
+                <a:solidFill>
+                  <a:srgbClr val="000066"/>
+                </a:solidFill>
                 <a:latin typeface="Microsoft JhengHei" panose="020B0604030504040204" pitchFamily="34" charset="-120"/>
                 <a:ea typeface="Microsoft JhengHei" panose="020B0604030504040204" pitchFamily="34" charset="-120"/>
               </a:rPr>
-              <a:t>神</a:t>
-            </a:r>
-            <a:r>
-              <a:rPr lang="zh-TW" altLang="en-US" sz="4800" b="1" dirty="0" smtClean="0">
+              <a:t>( </a:t>
+            </a:r>
+            <a:r>
+              <a:rPr lang="zh-CN" altLang="en-US" sz="3200" b="1" dirty="0">
+                <a:solidFill>
+                  <a:srgbClr val="000066"/>
+                </a:solidFill>
                 <a:latin typeface="Microsoft JhengHei" panose="020B0604030504040204" pitchFamily="34" charset="-120"/>
                 <a:ea typeface="Microsoft JhengHei" panose="020B0604030504040204" pitchFamily="34" charset="-120"/>
               </a:rPr>
-              <a:t>哪  我</a:t>
-            </a:r>
-            <a:r>
-              <a:rPr lang="zh-TW" altLang="en-US" sz="4800" b="1" dirty="0">
+              <a:t>正歌</a:t>
+            </a:r>
+            <a:r>
+              <a:rPr lang="en-US" sz="3200" b="1" dirty="0">
+                <a:solidFill>
+                  <a:srgbClr val="000066"/>
+                </a:solidFill>
                 <a:latin typeface="Microsoft JhengHei" panose="020B0604030504040204" pitchFamily="34" charset="-120"/>
                 <a:ea typeface="Microsoft JhengHei" panose="020B0604030504040204" pitchFamily="34" charset="-120"/>
               </a:rPr>
-              <a:t>要讚</a:t>
-            </a:r>
-            <a:r>
-              <a:rPr lang="zh-TW" altLang="en-US" sz="4800" b="1" dirty="0" smtClean="0">
+              <a:t> )</a:t>
+            </a:r>
+            <a:endParaRPr lang="vi-VN" sz="3200" b="1" dirty="0">
+              <a:solidFill>
+                <a:srgbClr val="000066"/>
+              </a:solidFill>
+              <a:ea typeface="Microsoft JhengHei" panose="020B0604030504040204" pitchFamily="34" charset="-120"/>
+            </a:endParaRPr>
+          </a:p>
+        </p:txBody>
+      </p:sp>
+    </p:spTree>
+    <p:extLst>
+      <p:ext uri="{BB962C8B-B14F-4D97-AF65-F5344CB8AC3E}">
+        <p14:creationId xmlns:p14="http://schemas.microsoft.com/office/powerpoint/2010/main" val="1174784636"/>
+      </p:ext>
+    </p:extLst>
+  </p:cSld>
+  <p:clrMapOvr>
+    <a:masterClrMapping/>
+  </p:clrMapOvr>
+</p:sld>
+</file>
+
+<file path=ppt/slides/slide4.xml><?xml version="1.0" encoding="utf-8"?>
+<p:sld xmlns:a="http://schemas.openxmlformats.org/drawingml/2006/main" xmlns:r="http://schemas.openxmlformats.org/officeDocument/2006/relationships" xmlns:p="http://schemas.openxmlformats.org/presentationml/2006/main">
+  <p:cSld>
+    <p:spTree>
+      <p:nvGrpSpPr>
+        <p:cNvPr id="1" name="">
+          <a:extLst>
+            <a:ext uri="{FF2B5EF4-FFF2-40B4-BE49-F238E27FC236}">
+              <a16:creationId xmlns:a16="http://schemas.microsoft.com/office/drawing/2014/main" id="{FA9484E9-489A-86DF-7077-08AF31249016}"/>
+            </a:ext>
+          </a:extLst>
+        </p:cNvPr>
+        <p:cNvGrpSpPr/>
+        <p:nvPr/>
+      </p:nvGrpSpPr>
+      <p:grpSpPr>
+        <a:xfrm>
+          <a:off x="0" y="0"/>
+          <a:ext cx="0" cy="0"/>
+          <a:chOff x="0" y="0"/>
+          <a:chExt cx="0" cy="0"/>
+        </a:xfrm>
+      </p:grpSpPr>
+      <p:sp>
+        <p:nvSpPr>
+          <p:cNvPr id="5" name="內容版面配置區 4">
+            <a:extLst>
+              <a:ext uri="{FF2B5EF4-FFF2-40B4-BE49-F238E27FC236}">
+                <a16:creationId xmlns:a16="http://schemas.microsoft.com/office/drawing/2014/main" id="{A34C5F20-7C6A-4A5D-562C-48C8A4F431E5}"/>
+              </a:ext>
+            </a:extLst>
+          </p:cNvPr>
+          <p:cNvSpPr>
+            <a:spLocks noGrp="1"/>
+          </p:cNvSpPr>
+          <p:nvPr>
+            <p:ph idx="1"/>
+          </p:nvPr>
+        </p:nvSpPr>
+        <p:spPr>
+          <a:xfrm>
+            <a:off x="0" y="2084853"/>
+            <a:ext cx="12192000" cy="2404863"/>
+          </a:xfrm>
+        </p:spPr>
+        <p:txBody>
+          <a:bodyPr anchor="ctr">
+            <a:normAutofit/>
+          </a:bodyPr>
+          <a:lstStyle/>
+          <a:p>
+            <a:pPr algn="ctr">
+              <a:buNone/>
+            </a:pPr>
+            <a:r>
+              <a:rPr lang="zh-CN" altLang="en-US" sz="6400" b="1" dirty="0">
+                <a:solidFill>
+                  <a:srgbClr val="000066"/>
+                </a:solidFill>
+                <a:latin typeface="微軟正黑體" pitchFamily="34" charset="-120"/>
+                <a:ea typeface="微軟正黑體" pitchFamily="34" charset="-120"/>
+              </a:rPr>
+              <a:t>南北屬祢  是祢所定</a:t>
+            </a:r>
+          </a:p>
+          <a:p>
+            <a:pPr algn="ctr">
+              <a:buNone/>
+            </a:pPr>
+            <a:r>
+              <a:rPr lang="zh-CN" altLang="en-US" sz="6400" b="1" dirty="0">
+                <a:solidFill>
+                  <a:srgbClr val="000066"/>
+                </a:solidFill>
+                <a:latin typeface="微軟正黑體" pitchFamily="34" charset="-120"/>
+                <a:ea typeface="微軟正黑體" pitchFamily="34" charset="-120"/>
+              </a:rPr>
+              <a:t>神哪  我要讚美祢</a:t>
+            </a:r>
+          </a:p>
+        </p:txBody>
+      </p:sp>
+      <p:sp>
+        <p:nvSpPr>
+          <p:cNvPr id="3" name="TextBox 2">
+            <a:extLst>
+              <a:ext uri="{FF2B5EF4-FFF2-40B4-BE49-F238E27FC236}">
+                <a16:creationId xmlns:a16="http://schemas.microsoft.com/office/drawing/2014/main" id="{1540A853-CF64-0D03-4908-F9B54307B29C}"/>
+              </a:ext>
+            </a:extLst>
+          </p:cNvPr>
+          <p:cNvSpPr txBox="1"/>
+          <p:nvPr/>
+        </p:nvSpPr>
+        <p:spPr>
+          <a:xfrm>
+            <a:off x="0" y="5157194"/>
+            <a:ext cx="12192000" cy="584775"/>
+          </a:xfrm>
+          <a:prstGeom prst="rect">
+            <a:avLst/>
+          </a:prstGeom>
+          <a:noFill/>
+        </p:spPr>
+        <p:txBody>
+          <a:bodyPr wrap="square" rtlCol="0">
+            <a:spAutoFit/>
+          </a:bodyPr>
+          <a:lstStyle/>
+          <a:p>
+            <a:pPr algn="ctr"/>
+            <a:r>
+              <a:rPr lang="en-US" sz="3200" b="1" dirty="0">
+                <a:solidFill>
+                  <a:srgbClr val="000066"/>
+                </a:solidFill>
                 <a:latin typeface="Microsoft JhengHei" panose="020B0604030504040204" pitchFamily="34" charset="-120"/>
                 <a:ea typeface="Microsoft JhengHei" panose="020B0604030504040204" pitchFamily="34" charset="-120"/>
               </a:rPr>
-              <a:t>美</a:t>
-            </a:r>
-            <a:r>
-              <a:rPr lang="zh-CN" altLang="en-US" sz="4800" b="1" dirty="0">
+              <a:t>( </a:t>
+            </a:r>
+            <a:r>
+              <a:rPr lang="zh-CN" altLang="en-US" sz="3200" b="1" dirty="0">
+                <a:solidFill>
+                  <a:srgbClr val="000066"/>
+                </a:solidFill>
                 <a:latin typeface="Microsoft JhengHei" panose="020B0604030504040204" pitchFamily="34" charset="-120"/>
                 <a:ea typeface="Microsoft JhengHei" panose="020B0604030504040204" pitchFamily="34" charset="-120"/>
               </a:rPr>
-              <a:t>袮</a:t>
-            </a:r>
-            <a:endParaRPr lang="vi-VN" sz="4800" b="1" dirty="0">
-              <a:ea typeface="Microsoft JhengHei" panose="020B0604030504040204" pitchFamily="34" charset="-120"/>
-            </a:endParaRPr>
-          </a:p>
-        </p:txBody>
-      </p:sp>
-      <p:sp>
-        <p:nvSpPr>
-          <p:cNvPr id="3" name="Content Placeholder 2"/>
-          <p:cNvSpPr>
-            <a:spLocks noGrp="1"/>
-          </p:cNvSpPr>
-          <p:nvPr>
-            <p:ph idx="1"/>
-          </p:nvPr>
-        </p:nvSpPr>
-        <p:spPr/>
-        <p:txBody>
-          <a:bodyPr>
-            <a:normAutofit/>
-          </a:bodyPr>
-          <a:lstStyle/>
-          <a:p>
-            <a:pPr marL="0" indent="0" algn="ctr">
-              <a:buNone/>
-            </a:pPr>
-            <a:r>
-              <a:rPr lang="zh-TW" altLang="en-US" sz="5400" b="1" dirty="0">
+              <a:t>前副歌</a:t>
+            </a:r>
+            <a:r>
+              <a:rPr lang="en-US" sz="3200" b="1" dirty="0">
+                <a:solidFill>
+                  <a:srgbClr val="000066"/>
+                </a:solidFill>
                 <a:latin typeface="Microsoft JhengHei" panose="020B0604030504040204" pitchFamily="34" charset="-120"/>
                 <a:ea typeface="Microsoft JhengHei" panose="020B0604030504040204" pitchFamily="34" charset="-120"/>
               </a:rPr>
-              <a:t>哈利路</a:t>
-            </a:r>
-            <a:r>
-              <a:rPr lang="zh-TW" altLang="en-US" sz="5400" b="1" dirty="0">
+              <a:t> )</a:t>
+            </a:r>
+            <a:endParaRPr lang="vi-VN" sz="3200" b="1" dirty="0">
+              <a:solidFill>
+                <a:srgbClr val="000066"/>
+              </a:solidFill>
+              <a:ea typeface="Microsoft JhengHei" panose="020B0604030504040204" pitchFamily="34" charset="-120"/>
+            </a:endParaRPr>
+          </a:p>
+        </p:txBody>
+      </p:sp>
+    </p:spTree>
+    <p:extLst>
+      <p:ext uri="{BB962C8B-B14F-4D97-AF65-F5344CB8AC3E}">
+        <p14:creationId xmlns:p14="http://schemas.microsoft.com/office/powerpoint/2010/main" val="628862574"/>
+      </p:ext>
+    </p:extLst>
+  </p:cSld>
+  <p:clrMapOvr>
+    <a:masterClrMapping/>
+  </p:clrMapOvr>
+</p:sld>
+</file>
+
+<file path=ppt/slides/slide5.xml><?xml version="1.0" encoding="utf-8"?>
+<p:sld xmlns:a="http://schemas.openxmlformats.org/drawingml/2006/main" xmlns:r="http://schemas.openxmlformats.org/officeDocument/2006/relationships" xmlns:p="http://schemas.openxmlformats.org/presentationml/2006/main">
+  <p:cSld>
+    <p:spTree>
+      <p:nvGrpSpPr>
+        <p:cNvPr id="1" name="">
+          <a:extLst>
+            <a:ext uri="{FF2B5EF4-FFF2-40B4-BE49-F238E27FC236}">
+              <a16:creationId xmlns:a16="http://schemas.microsoft.com/office/drawing/2014/main" id="{D5A38E2C-DF04-2701-BE26-701B63122396}"/>
+            </a:ext>
+          </a:extLst>
+        </p:cNvPr>
+        <p:cNvGrpSpPr/>
+        <p:nvPr/>
+      </p:nvGrpSpPr>
+      <p:grpSpPr>
+        <a:xfrm>
+          <a:off x="0" y="0"/>
+          <a:ext cx="0" cy="0"/>
+          <a:chOff x="0" y="0"/>
+          <a:chExt cx="0" cy="0"/>
+        </a:xfrm>
+      </p:grpSpPr>
+      <p:sp>
+        <p:nvSpPr>
+          <p:cNvPr id="5" name="內容版面配置區 4">
+            <a:extLst>
+              <a:ext uri="{FF2B5EF4-FFF2-40B4-BE49-F238E27FC236}">
+                <a16:creationId xmlns:a16="http://schemas.microsoft.com/office/drawing/2014/main" id="{B1F11DE8-A8E6-93B7-E7EB-1F30E2CD7184}"/>
+              </a:ext>
+            </a:extLst>
+          </p:cNvPr>
+          <p:cNvSpPr>
+            <a:spLocks noGrp="1"/>
+          </p:cNvSpPr>
+          <p:nvPr>
+            <p:ph idx="1"/>
+          </p:nvPr>
+        </p:nvSpPr>
+        <p:spPr>
+          <a:xfrm>
+            <a:off x="0" y="2084853"/>
+            <a:ext cx="12192000" cy="2404863"/>
+          </a:xfrm>
+        </p:spPr>
+        <p:txBody>
+          <a:bodyPr anchor="ctr">
+            <a:normAutofit/>
+          </a:bodyPr>
+          <a:lstStyle/>
+          <a:p>
+            <a:pPr algn="ctr">
+              <a:buNone/>
+            </a:pPr>
+            <a:r>
+              <a:rPr lang="zh-TW" altLang="en-US" sz="6400" b="1" dirty="0">
+                <a:solidFill>
+                  <a:srgbClr val="000066"/>
+                </a:solidFill>
+                <a:latin typeface="微軟正黑體" pitchFamily="34" charset="-120"/>
+                <a:ea typeface="微軟正黑體" pitchFamily="34" charset="-120"/>
+              </a:rPr>
+              <a:t>公義屬祢  慈愛屬祢</a:t>
+            </a:r>
+          </a:p>
+          <a:p>
+            <a:pPr algn="ctr">
+              <a:buNone/>
+            </a:pPr>
+            <a:r>
+              <a:rPr lang="zh-TW" altLang="en-US" sz="6400" b="1" dirty="0">
+                <a:solidFill>
+                  <a:srgbClr val="000066"/>
+                </a:solidFill>
+                <a:latin typeface="微軟正黑體" pitchFamily="34" charset="-120"/>
+                <a:ea typeface="微軟正黑體" pitchFamily="34" charset="-120"/>
+              </a:rPr>
+              <a:t>神哪  我要讚美祢</a:t>
+            </a:r>
+          </a:p>
+        </p:txBody>
+      </p:sp>
+      <p:sp>
+        <p:nvSpPr>
+          <p:cNvPr id="3" name="TextBox 2">
+            <a:extLst>
+              <a:ext uri="{FF2B5EF4-FFF2-40B4-BE49-F238E27FC236}">
+                <a16:creationId xmlns:a16="http://schemas.microsoft.com/office/drawing/2014/main" id="{060327E4-5960-365E-FE63-22521D63ED6B}"/>
+              </a:ext>
+            </a:extLst>
+          </p:cNvPr>
+          <p:cNvSpPr txBox="1"/>
+          <p:nvPr/>
+        </p:nvSpPr>
+        <p:spPr>
+          <a:xfrm>
+            <a:off x="0" y="5157194"/>
+            <a:ext cx="12192000" cy="584775"/>
+          </a:xfrm>
+          <a:prstGeom prst="rect">
+            <a:avLst/>
+          </a:prstGeom>
+          <a:noFill/>
+        </p:spPr>
+        <p:txBody>
+          <a:bodyPr wrap="square" rtlCol="0">
+            <a:spAutoFit/>
+          </a:bodyPr>
+          <a:lstStyle/>
+          <a:p>
+            <a:pPr algn="ctr"/>
+            <a:r>
+              <a:rPr lang="en-US" sz="3200" b="1" dirty="0">
+                <a:solidFill>
+                  <a:srgbClr val="000066"/>
+                </a:solidFill>
                 <a:latin typeface="Microsoft JhengHei" panose="020B0604030504040204" pitchFamily="34" charset="-120"/>
                 <a:ea typeface="Microsoft JhengHei" panose="020B0604030504040204" pitchFamily="34" charset="-120"/>
               </a:rPr>
-              <a:t>亞  哈</a:t>
-            </a:r>
-            <a:r>
-              <a:rPr lang="zh-TW" altLang="en-US" sz="5400" b="1" dirty="0">
+              <a:t>( </a:t>
+            </a:r>
+            <a:r>
+              <a:rPr lang="zh-CN" altLang="en-US" sz="3200" b="1" dirty="0">
+                <a:solidFill>
+                  <a:srgbClr val="000066"/>
+                </a:solidFill>
                 <a:latin typeface="Microsoft JhengHei" panose="020B0604030504040204" pitchFamily="34" charset="-120"/>
                 <a:ea typeface="Microsoft JhengHei" panose="020B0604030504040204" pitchFamily="34" charset="-120"/>
               </a:rPr>
-              <a:t>利路</a:t>
-            </a:r>
-            <a:r>
-              <a:rPr lang="zh-TW" altLang="en-US" sz="5400" b="1" dirty="0">
+              <a:t>前副歌</a:t>
+            </a:r>
+            <a:r>
+              <a:rPr lang="en-US" sz="3200" b="1" dirty="0">
+                <a:solidFill>
+                  <a:srgbClr val="000066"/>
+                </a:solidFill>
                 <a:latin typeface="Microsoft JhengHei" panose="020B0604030504040204" pitchFamily="34" charset="-120"/>
                 <a:ea typeface="Microsoft JhengHei" panose="020B0604030504040204" pitchFamily="34" charset="-120"/>
               </a:rPr>
-              <a:t>亞</a:t>
-            </a:r>
-            <a:endParaRPr lang="en-US" altLang="zh-TW" sz="5400" b="1" dirty="0">
-              <a:latin typeface="Microsoft JhengHei" panose="020B0604030504040204" pitchFamily="34" charset="-120"/>
+              <a:t> )</a:t>
+            </a:r>
+            <a:endParaRPr lang="vi-VN" sz="3200" b="1" dirty="0">
+              <a:solidFill>
+                <a:srgbClr val="000066"/>
+              </a:solidFill>
               <a:ea typeface="Microsoft JhengHei" panose="020B0604030504040204" pitchFamily="34" charset="-120"/>
             </a:endParaRPr>
           </a:p>
-          <a:p>
-            <a:pPr marL="0" indent="0" algn="ctr">
+        </p:txBody>
+      </p:sp>
+    </p:spTree>
+    <p:extLst>
+      <p:ext uri="{BB962C8B-B14F-4D97-AF65-F5344CB8AC3E}">
+        <p14:creationId xmlns:p14="http://schemas.microsoft.com/office/powerpoint/2010/main" val="743251625"/>
+      </p:ext>
+    </p:extLst>
+  </p:cSld>
+  <p:clrMapOvr>
+    <a:masterClrMapping/>
+  </p:clrMapOvr>
+</p:sld>
+</file>
+
+<file path=ppt/slides/slide6.xml><?xml version="1.0" encoding="utf-8"?>
+<p:sld xmlns:a="http://schemas.openxmlformats.org/drawingml/2006/main" xmlns:r="http://schemas.openxmlformats.org/officeDocument/2006/relationships" xmlns:p="http://schemas.openxmlformats.org/presentationml/2006/main">
+  <p:cSld>
+    <p:spTree>
+      <p:nvGrpSpPr>
+        <p:cNvPr id="1" name="">
+          <a:extLst>
+            <a:ext uri="{FF2B5EF4-FFF2-40B4-BE49-F238E27FC236}">
+              <a16:creationId xmlns:a16="http://schemas.microsoft.com/office/drawing/2014/main" id="{B0926F2B-576E-3BB0-7CFC-723B772D98CA}"/>
+            </a:ext>
+          </a:extLst>
+        </p:cNvPr>
+        <p:cNvGrpSpPr/>
+        <p:nvPr/>
+      </p:nvGrpSpPr>
+      <p:grpSpPr>
+        <a:xfrm>
+          <a:off x="0" y="0"/>
+          <a:ext cx="0" cy="0"/>
+          <a:chOff x="0" y="0"/>
+          <a:chExt cx="0" cy="0"/>
+        </a:xfrm>
+      </p:grpSpPr>
+      <p:sp>
+        <p:nvSpPr>
+          <p:cNvPr id="5" name="內容版面配置區 4">
+            <a:extLst>
+              <a:ext uri="{FF2B5EF4-FFF2-40B4-BE49-F238E27FC236}">
+                <a16:creationId xmlns:a16="http://schemas.microsoft.com/office/drawing/2014/main" id="{63B0C8B5-71F4-02E3-5BDF-0160FA288CB3}"/>
+              </a:ext>
+            </a:extLst>
+          </p:cNvPr>
+          <p:cNvSpPr>
+            <a:spLocks noGrp="1"/>
+          </p:cNvSpPr>
+          <p:nvPr>
+            <p:ph idx="1"/>
+          </p:nvPr>
+        </p:nvSpPr>
+        <p:spPr>
+          <a:xfrm>
+            <a:off x="0" y="2084853"/>
+            <a:ext cx="12192000" cy="2404863"/>
+          </a:xfrm>
+        </p:spPr>
+        <p:txBody>
+          <a:bodyPr anchor="ctr">
+            <a:normAutofit/>
+          </a:bodyPr>
+          <a:lstStyle/>
+          <a:p>
+            <a:pPr algn="ctr">
               <a:buNone/>
             </a:pPr>
             <a:r>
-              <a:rPr lang="zh-TW" altLang="en-US" sz="5400" b="1" dirty="0">
+              <a:rPr lang="zh-TW" altLang="en-US" sz="6400" b="1" dirty="0">
+                <a:solidFill>
+                  <a:srgbClr val="000066"/>
+                </a:solidFill>
+                <a:latin typeface="微軟正黑體" pitchFamily="34" charset="-120"/>
+                <a:ea typeface="微軟正黑體" pitchFamily="34" charset="-120"/>
+              </a:rPr>
+              <a:t>哈利路亞  哈利路亞</a:t>
+            </a:r>
+          </a:p>
+          <a:p>
+            <a:pPr algn="ctr">
+              <a:buNone/>
+            </a:pPr>
+            <a:r>
+              <a:rPr lang="zh-TW" altLang="en-US" sz="6400" b="1" dirty="0">
+                <a:solidFill>
+                  <a:srgbClr val="000066"/>
+                </a:solidFill>
+                <a:latin typeface="微軟正黑體" pitchFamily="34" charset="-120"/>
+                <a:ea typeface="微軟正黑體" pitchFamily="34" charset="-120"/>
+              </a:rPr>
+              <a:t>哈利路亞  哈利路亞</a:t>
+            </a:r>
+          </a:p>
+        </p:txBody>
+      </p:sp>
+      <p:sp>
+        <p:nvSpPr>
+          <p:cNvPr id="3" name="TextBox 2">
+            <a:extLst>
+              <a:ext uri="{FF2B5EF4-FFF2-40B4-BE49-F238E27FC236}">
+                <a16:creationId xmlns:a16="http://schemas.microsoft.com/office/drawing/2014/main" id="{B9101AAB-B352-8739-C162-36213F39DED1}"/>
+              </a:ext>
+            </a:extLst>
+          </p:cNvPr>
+          <p:cNvSpPr txBox="1"/>
+          <p:nvPr/>
+        </p:nvSpPr>
+        <p:spPr>
+          <a:xfrm>
+            <a:off x="0" y="5157194"/>
+            <a:ext cx="12192000" cy="584775"/>
+          </a:xfrm>
+          <a:prstGeom prst="rect">
+            <a:avLst/>
+          </a:prstGeom>
+          <a:noFill/>
+        </p:spPr>
+        <p:txBody>
+          <a:bodyPr wrap="square" rtlCol="0">
+            <a:spAutoFit/>
+          </a:bodyPr>
+          <a:lstStyle/>
+          <a:p>
+            <a:pPr algn="ctr"/>
+            <a:r>
+              <a:rPr lang="en-US" sz="3200" b="1" dirty="0">
+                <a:solidFill>
+                  <a:srgbClr val="000066"/>
+                </a:solidFill>
                 <a:latin typeface="Microsoft JhengHei" panose="020B0604030504040204" pitchFamily="34" charset="-120"/>
                 <a:ea typeface="Microsoft JhengHei" panose="020B0604030504040204" pitchFamily="34" charset="-120"/>
               </a:rPr>
-              <a:t>哈</a:t>
-            </a:r>
-            <a:r>
-              <a:rPr lang="zh-TW" altLang="en-US" sz="5400" b="1" dirty="0">
+              <a:t>( </a:t>
+            </a:r>
+            <a:r>
+              <a:rPr lang="zh-CN" altLang="en-US" sz="3200" b="1" dirty="0">
+                <a:solidFill>
+                  <a:srgbClr val="000066"/>
+                </a:solidFill>
                 <a:latin typeface="Microsoft JhengHei" panose="020B0604030504040204" pitchFamily="34" charset="-120"/>
                 <a:ea typeface="Microsoft JhengHei" panose="020B0604030504040204" pitchFamily="34" charset="-120"/>
               </a:rPr>
-              <a:t>利路</a:t>
-            </a:r>
-            <a:r>
-              <a:rPr lang="zh-TW" altLang="en-US" sz="5400" b="1" dirty="0">
+              <a:t>副歌</a:t>
+            </a:r>
+            <a:r>
+              <a:rPr lang="en-US" sz="3200" b="1" dirty="0">
+                <a:solidFill>
+                  <a:srgbClr val="000066"/>
+                </a:solidFill>
                 <a:latin typeface="Microsoft JhengHei" panose="020B0604030504040204" pitchFamily="34" charset="-120"/>
                 <a:ea typeface="Microsoft JhengHei" panose="020B0604030504040204" pitchFamily="34" charset="-120"/>
               </a:rPr>
-              <a:t>亞  哈</a:t>
-            </a:r>
-            <a:r>
-              <a:rPr lang="zh-TW" altLang="en-US" sz="5400" b="1" dirty="0">
+              <a:t> )</a:t>
+            </a:r>
+            <a:endParaRPr lang="vi-VN" sz="3200" b="1" dirty="0">
+              <a:solidFill>
+                <a:srgbClr val="000066"/>
+              </a:solidFill>
+              <a:ea typeface="Microsoft JhengHei" panose="020B0604030504040204" pitchFamily="34" charset="-120"/>
+            </a:endParaRPr>
+          </a:p>
+        </p:txBody>
+      </p:sp>
+    </p:spTree>
+    <p:extLst>
+      <p:ext uri="{BB962C8B-B14F-4D97-AF65-F5344CB8AC3E}">
+        <p14:creationId xmlns:p14="http://schemas.microsoft.com/office/powerpoint/2010/main" val="582705795"/>
+      </p:ext>
+    </p:extLst>
+  </p:cSld>
+  <p:clrMapOvr>
+    <a:masterClrMapping/>
+  </p:clrMapOvr>
+</p:sld>
+</file>
+
+<file path=ppt/slides/slide7.xml><?xml version="1.0" encoding="utf-8"?>
+<p:sld xmlns:a="http://schemas.openxmlformats.org/drawingml/2006/main" xmlns:r="http://schemas.openxmlformats.org/officeDocument/2006/relationships" xmlns:p="http://schemas.openxmlformats.org/presentationml/2006/main">
+  <p:cSld>
+    <p:spTree>
+      <p:nvGrpSpPr>
+        <p:cNvPr id="1" name="">
+          <a:extLst>
+            <a:ext uri="{FF2B5EF4-FFF2-40B4-BE49-F238E27FC236}">
+              <a16:creationId xmlns:a16="http://schemas.microsoft.com/office/drawing/2014/main" id="{73654DAD-A2D3-6FE3-E5D4-AF64CDD617E2}"/>
+            </a:ext>
+          </a:extLst>
+        </p:cNvPr>
+        <p:cNvGrpSpPr/>
+        <p:nvPr/>
+      </p:nvGrpSpPr>
+      <p:grpSpPr>
+        <a:xfrm>
+          <a:off x="0" y="0"/>
+          <a:ext cx="0" cy="0"/>
+          <a:chOff x="0" y="0"/>
+          <a:chExt cx="0" cy="0"/>
+        </a:xfrm>
+      </p:grpSpPr>
+      <p:sp>
+        <p:nvSpPr>
+          <p:cNvPr id="5" name="內容版面配置區 4">
+            <a:extLst>
+              <a:ext uri="{FF2B5EF4-FFF2-40B4-BE49-F238E27FC236}">
+                <a16:creationId xmlns:a16="http://schemas.microsoft.com/office/drawing/2014/main" id="{CE18EAC8-EDDF-056F-806E-1F720892E7BF}"/>
+              </a:ext>
+            </a:extLst>
+          </p:cNvPr>
+          <p:cNvSpPr>
+            <a:spLocks noGrp="1"/>
+          </p:cNvSpPr>
+          <p:nvPr>
+            <p:ph idx="1"/>
+          </p:nvPr>
+        </p:nvSpPr>
+        <p:spPr>
+          <a:xfrm>
+            <a:off x="0" y="2084853"/>
+            <a:ext cx="12192000" cy="2404863"/>
+          </a:xfrm>
+        </p:spPr>
+        <p:txBody>
+          <a:bodyPr anchor="ctr">
+            <a:normAutofit/>
+          </a:bodyPr>
+          <a:lstStyle/>
+          <a:p>
+            <a:pPr algn="ctr">
+              <a:buNone/>
+            </a:pPr>
+            <a:r>
+              <a:rPr lang="zh-TW" altLang="en-US" sz="6400" b="1" dirty="0">
+                <a:solidFill>
+                  <a:srgbClr val="000066"/>
+                </a:solidFill>
+                <a:latin typeface="微軟正黑體" pitchFamily="34" charset="-120"/>
+                <a:ea typeface="微軟正黑體" pitchFamily="34" charset="-120"/>
+              </a:rPr>
+              <a:t>哈利路亞  哈利路亞</a:t>
+            </a:r>
+          </a:p>
+          <a:p>
+            <a:pPr algn="ctr">
+              <a:buNone/>
+            </a:pPr>
+            <a:r>
+              <a:rPr lang="zh-TW" altLang="en-US" sz="6400" b="1" dirty="0">
+                <a:solidFill>
+                  <a:srgbClr val="000066"/>
+                </a:solidFill>
+                <a:latin typeface="微軟正黑體" pitchFamily="34" charset="-120"/>
+                <a:ea typeface="微軟正黑體" pitchFamily="34" charset="-120"/>
+              </a:rPr>
+              <a:t>哈利路亞</a:t>
+            </a:r>
+          </a:p>
+        </p:txBody>
+      </p:sp>
+      <p:sp>
+        <p:nvSpPr>
+          <p:cNvPr id="3" name="TextBox 2">
+            <a:extLst>
+              <a:ext uri="{FF2B5EF4-FFF2-40B4-BE49-F238E27FC236}">
+                <a16:creationId xmlns:a16="http://schemas.microsoft.com/office/drawing/2014/main" id="{EA24E44C-8DE3-3C8A-7312-51B84111FCEF}"/>
+              </a:ext>
+            </a:extLst>
+          </p:cNvPr>
+          <p:cNvSpPr txBox="1"/>
+          <p:nvPr/>
+        </p:nvSpPr>
+        <p:spPr>
+          <a:xfrm>
+            <a:off x="0" y="5157194"/>
+            <a:ext cx="12192000" cy="584775"/>
+          </a:xfrm>
+          <a:prstGeom prst="rect">
+            <a:avLst/>
+          </a:prstGeom>
+          <a:noFill/>
+        </p:spPr>
+        <p:txBody>
+          <a:bodyPr wrap="square" rtlCol="0">
+            <a:spAutoFit/>
+          </a:bodyPr>
+          <a:lstStyle/>
+          <a:p>
+            <a:pPr algn="ctr"/>
+            <a:r>
+              <a:rPr lang="en-US" sz="3200" b="1" dirty="0">
+                <a:solidFill>
+                  <a:srgbClr val="000066"/>
+                </a:solidFill>
                 <a:latin typeface="Microsoft JhengHei" panose="020B0604030504040204" pitchFamily="34" charset="-120"/>
                 <a:ea typeface="Microsoft JhengHei" panose="020B0604030504040204" pitchFamily="34" charset="-120"/>
               </a:rPr>
-              <a:t>利路</a:t>
-            </a:r>
-            <a:r>
-              <a:rPr lang="zh-TW" altLang="en-US" sz="5400" b="1" dirty="0">
+              <a:t>( </a:t>
+            </a:r>
+            <a:r>
+              <a:rPr lang="zh-CN" altLang="en-US" sz="3200" b="1" dirty="0">
+                <a:solidFill>
+                  <a:srgbClr val="000066"/>
+                </a:solidFill>
                 <a:latin typeface="Microsoft JhengHei" panose="020B0604030504040204" pitchFamily="34" charset="-120"/>
                 <a:ea typeface="Microsoft JhengHei" panose="020B0604030504040204" pitchFamily="34" charset="-120"/>
               </a:rPr>
-              <a:t>亞</a:t>
-            </a:r>
-            <a:endParaRPr lang="en-US" altLang="zh-TW" sz="5400" b="1" dirty="0">
-              <a:latin typeface="Microsoft JhengHei" panose="020B0604030504040204" pitchFamily="34" charset="-120"/>
-              <a:ea typeface="Microsoft JhengHei" panose="020B0604030504040204" pitchFamily="34" charset="-120"/>
-            </a:endParaRPr>
-          </a:p>
-          <a:p>
-            <a:pPr marL="0" indent="0" algn="ctr">
-              <a:buNone/>
-            </a:pPr>
-            <a:r>
-              <a:rPr lang="zh-TW" altLang="en-US" sz="5400" b="1" dirty="0">
+              <a:t>副歌</a:t>
+            </a:r>
+            <a:r>
+              <a:rPr lang="en-US" sz="3200" b="1" dirty="0">
+                <a:solidFill>
+                  <a:srgbClr val="000066"/>
+                </a:solidFill>
                 <a:latin typeface="Microsoft JhengHei" panose="020B0604030504040204" pitchFamily="34" charset="-120"/>
                 <a:ea typeface="Microsoft JhengHei" panose="020B0604030504040204" pitchFamily="34" charset="-120"/>
               </a:rPr>
-              <a:t>哈</a:t>
-            </a:r>
-            <a:r>
-              <a:rPr lang="zh-TW" altLang="en-US" sz="5400" b="1" dirty="0">
-                <a:latin typeface="Microsoft JhengHei" panose="020B0604030504040204" pitchFamily="34" charset="-120"/>
-                <a:ea typeface="Microsoft JhengHei" panose="020B0604030504040204" pitchFamily="34" charset="-120"/>
-              </a:rPr>
-              <a:t>利路</a:t>
-            </a:r>
-            <a:r>
-              <a:rPr lang="zh-TW" altLang="en-US" sz="5400" b="1" dirty="0">
-                <a:latin typeface="Microsoft JhengHei" panose="020B0604030504040204" pitchFamily="34" charset="-120"/>
-                <a:ea typeface="Microsoft JhengHei" panose="020B0604030504040204" pitchFamily="34" charset="-120"/>
-              </a:rPr>
-              <a:t>亞  哈</a:t>
-            </a:r>
-            <a:r>
-              <a:rPr lang="zh-TW" altLang="en-US" sz="5400" b="1" dirty="0">
-                <a:latin typeface="Microsoft JhengHei" panose="020B0604030504040204" pitchFamily="34" charset="-120"/>
-                <a:ea typeface="Microsoft JhengHei" panose="020B0604030504040204" pitchFamily="34" charset="-120"/>
-              </a:rPr>
-              <a:t>利路</a:t>
-            </a:r>
-            <a:r>
-              <a:rPr lang="zh-TW" altLang="en-US" sz="5400" b="1" dirty="0">
-                <a:latin typeface="Microsoft JhengHei" panose="020B0604030504040204" pitchFamily="34" charset="-120"/>
-                <a:ea typeface="Microsoft JhengHei" panose="020B0604030504040204" pitchFamily="34" charset="-120"/>
-              </a:rPr>
-              <a:t>亞</a:t>
-            </a:r>
-            <a:endParaRPr lang="en-US" altLang="zh-TW" sz="5400" b="1" dirty="0">
-              <a:latin typeface="Microsoft JhengHei" panose="020B0604030504040204" pitchFamily="34" charset="-120"/>
-              <a:ea typeface="Microsoft JhengHei" panose="020B0604030504040204" pitchFamily="34" charset="-120"/>
-            </a:endParaRPr>
-          </a:p>
-          <a:p>
-            <a:pPr marL="0" indent="0" algn="ctr">
-              <a:buNone/>
-            </a:pPr>
-            <a:r>
-              <a:rPr lang="zh-TW" altLang="en-US" sz="5400" b="1" dirty="0">
-                <a:latin typeface="Microsoft JhengHei" panose="020B0604030504040204" pitchFamily="34" charset="-120"/>
-                <a:ea typeface="Microsoft JhengHei" panose="020B0604030504040204" pitchFamily="34" charset="-120"/>
-              </a:rPr>
-              <a:t>哈</a:t>
-            </a:r>
-            <a:r>
-              <a:rPr lang="zh-TW" altLang="en-US" sz="5400" b="1" dirty="0">
-                <a:latin typeface="Microsoft JhengHei" panose="020B0604030504040204" pitchFamily="34" charset="-120"/>
-                <a:ea typeface="Microsoft JhengHei" panose="020B0604030504040204" pitchFamily="34" charset="-120"/>
-              </a:rPr>
-              <a:t>利路亞</a:t>
-            </a:r>
-            <a:endParaRPr lang="vi-VN" sz="5400" b="1" dirty="0">
-              <a:latin typeface="Microsoft JhengHei" panose="020B0604030504040204" pitchFamily="34" charset="-120"/>
+              <a:t> )</a:t>
+            </a:r>
+            <a:endParaRPr lang="vi-VN" sz="3200" b="1" dirty="0">
+              <a:solidFill>
+                <a:srgbClr val="000066"/>
+              </a:solidFill>
               <a:ea typeface="Microsoft JhengHei" panose="020B0604030504040204" pitchFamily="34" charset="-120"/>
             </a:endParaRPr>
           </a:p>
@@ -3931,7 +4148,7 @@
     </p:spTree>
     <p:extLst>
       <p:ext uri="{BB962C8B-B14F-4D97-AF65-F5344CB8AC3E}">
-        <p14:creationId xmlns:p14="http://schemas.microsoft.com/office/powerpoint/2010/main" val="135515836"/>
+        <p14:creationId xmlns:p14="http://schemas.microsoft.com/office/powerpoint/2010/main" val="3975734488"/>
       </p:ext>
     </p:extLst>
   </p:cSld>
